--- a/output/wordlabs-cede-3day.pptx
+++ b/output/wordlabs-cede-3day.pptx
@@ -6040,7 +6040,7 @@
                 <a:ea typeface="Calibri" pitchFamily="34" charset="-122"/>
                 <a:cs typeface="Calibri" pitchFamily="34" charset="-120"/>
               </a:rPr>
-              <a:t>Did the floodwaters </a:t>
+              <a:t>The floodwaters will </a:t>
             </a:r>
             <a:pPr algn="l" indent="0" marL="0">
               <a:buNone/>
@@ -6071,7 +6071,7 @@
                 <a:ea typeface="Calibri" pitchFamily="34" charset="-122"/>
                 <a:cs typeface="Calibri" pitchFamily="34" charset="-120"/>
               </a:rPr>
-              <a:t> before the town decided to </a:t>
+              <a:t> by morning, but our team must </a:t>
             </a:r>
             <a:pPr algn="l" indent="0" marL="0">
               <a:buNone/>
@@ -6102,7 +6102,7 @@
                 <a:ea typeface="Calibri" pitchFamily="34" charset="-122"/>
                 <a:cs typeface="Calibri" pitchFamily="34" charset="-120"/>
               </a:rPr>
-              <a:t> that extra help was needed?</a:t>
+              <a:t> that the damage is serious.</a:t>
             </a:r>
             <a:endParaRPr lang="en-US" sz="1800" dirty="0"/>
           </a:p>
@@ -10445,7 +10445,7 @@
         </p:nvSpPr>
         <p:spPr>
           <a:xfrm>
-            <a:off x="2254649" y="4169664"/>
+            <a:off x="2427732" y="4169664"/>
             <a:ext cx="685800" cy="384048"/>
           </a:xfrm>
           <a:prstGeom prst="rect">
@@ -10472,7 +10472,7 @@
         </p:nvSpPr>
         <p:spPr>
           <a:xfrm>
-            <a:off x="2254649" y="4169664"/>
+            <a:off x="2427732" y="4169664"/>
             <a:ext cx="685800" cy="384048"/>
           </a:xfrm>
           <a:prstGeom prst="rect">
@@ -10511,7 +10511,7 @@
         </p:nvSpPr>
         <p:spPr>
           <a:xfrm>
-            <a:off x="3293146" y="4169664"/>
+            <a:off x="3639312" y="4169664"/>
             <a:ext cx="685800" cy="384048"/>
           </a:xfrm>
           <a:prstGeom prst="rect">
@@ -10538,7 +10538,7 @@
         </p:nvSpPr>
         <p:spPr>
           <a:xfrm>
-            <a:off x="3293146" y="4169664"/>
+            <a:off x="3639312" y="4169664"/>
             <a:ext cx="685800" cy="384048"/>
           </a:xfrm>
           <a:prstGeom prst="rect">
@@ -10577,7 +10577,7 @@
         </p:nvSpPr>
         <p:spPr>
           <a:xfrm>
-            <a:off x="4331643" y="4169664"/>
+            <a:off x="4850892" y="4169664"/>
             <a:ext cx="685800" cy="384048"/>
           </a:xfrm>
           <a:prstGeom prst="rect">
@@ -10604,7 +10604,7 @@
         </p:nvSpPr>
         <p:spPr>
           <a:xfrm>
-            <a:off x="4331643" y="4169664"/>
+            <a:off x="4850892" y="4169664"/>
             <a:ext cx="685800" cy="384048"/>
           </a:xfrm>
           <a:prstGeom prst="rect">
@@ -10643,7 +10643,7 @@
         </p:nvSpPr>
         <p:spPr>
           <a:xfrm>
-            <a:off x="4331643" y="4572000"/>
+            <a:off x="4850892" y="4572000"/>
             <a:ext cx="685800" cy="219456"/>
           </a:xfrm>
           <a:prstGeom prst="rect">
@@ -10682,7 +10682,7 @@
         </p:nvSpPr>
         <p:spPr>
           <a:xfrm>
-            <a:off x="5370141" y="4169664"/>
+            <a:off x="6062472" y="4169664"/>
             <a:ext cx="685800" cy="384048"/>
           </a:xfrm>
           <a:prstGeom prst="rect">
@@ -10709,7 +10709,7 @@
         </p:nvSpPr>
         <p:spPr>
           <a:xfrm>
-            <a:off x="5370141" y="4169664"/>
+            <a:off x="6062472" y="4169664"/>
             <a:ext cx="685800" cy="384048"/>
           </a:xfrm>
           <a:prstGeom prst="rect">
@@ -10748,7 +10748,7 @@
         </p:nvSpPr>
         <p:spPr>
           <a:xfrm>
-            <a:off x="6408638" y="4169664"/>
+            <a:off x="7274052" y="4169664"/>
             <a:ext cx="685800" cy="384048"/>
           </a:xfrm>
           <a:prstGeom prst="rect">
@@ -10775,7 +10775,7 @@
         </p:nvSpPr>
         <p:spPr>
           <a:xfrm>
-            <a:off x="6408638" y="4169664"/>
+            <a:off x="7274052" y="4169664"/>
             <a:ext cx="685800" cy="384048"/>
           </a:xfrm>
           <a:prstGeom prst="rect">
@@ -10800,73 +10800,7 @@
                 <a:ea typeface="Trebuchet MS" pitchFamily="34" charset="-122"/>
                 <a:cs typeface="Trebuchet MS" pitchFamily="34" charset="-120"/>
               </a:rPr>
-              <a:t>d</a:t>
-            </a:r>
-            <a:endParaRPr lang="en-US" sz="900" dirty="0"/>
-          </a:p>
-        </p:txBody>
-      </p:sp>
-      <p:sp>
-        <p:nvSpPr>
-          <p:cNvPr id="44" name="Shape 42"/>
-          <p:cNvSpPr/>
-          <p:nvPr/>
-        </p:nvSpPr>
-        <p:spPr>
-          <a:xfrm>
-            <a:off x="7447135" y="4169664"/>
-            <a:ext cx="685800" cy="384048"/>
-          </a:xfrm>
-          <a:prstGeom prst="rect">
-            <a:avLst>
-              <a:gd name="adj" fmla="val 9524"/>
-            </a:avLst>
-          </a:prstGeom>
-          <a:solidFill>
-            <a:srgbClr val="FFFFFF"/>
-          </a:solidFill>
-          <a:ln w="12700">
-            <a:solidFill>
-              <a:srgbClr val="DB2777"/>
-            </a:solidFill>
-            <a:prstDash val="solid"/>
-          </a:ln>
-        </p:spPr>
-      </p:sp>
-      <p:sp>
-        <p:nvSpPr>
-          <p:cNvPr id="45" name="Text 43"/>
-          <p:cNvSpPr/>
-          <p:nvPr/>
-        </p:nvSpPr>
-        <p:spPr>
-          <a:xfrm>
-            <a:off x="7447135" y="4169664"/>
-            <a:ext cx="685800" cy="384048"/>
-          </a:xfrm>
-          <a:prstGeom prst="rect">
-            <a:avLst/>
-          </a:prstGeom>
-          <a:noFill/>
-          <a:ln/>
-        </p:spPr>
-        <p:txBody>
-          <a:bodyPr wrap="square" lIns="0" tIns="0" rIns="0" bIns="0" rtlCol="0" anchor="ctr"/>
-          <a:lstStyle/>
-          <a:p>
-            <a:pPr algn="ctr" indent="0" marL="0">
-              <a:buNone/>
-            </a:pPr>
-            <a:r>
-              <a:rPr lang="en-US" sz="900" b="1" dirty="0">
-                <a:solidFill>
-                  <a:srgbClr val="9D174D"/>
-                </a:solidFill>
-                <a:latin typeface="Trebuchet MS" pitchFamily="34" charset="0"/>
-                <a:ea typeface="Trebuchet MS" pitchFamily="34" charset="-122"/>
-                <a:cs typeface="Trebuchet MS" pitchFamily="34" charset="-120"/>
-              </a:rPr>
-              <a:t>e</a:t>
+              <a:t>de</a:t>
             </a:r>
             <a:endParaRPr lang="en-US" sz="900" dirty="0"/>
           </a:p>
@@ -15152,7 +15086,7 @@
         </p:nvSpPr>
         <p:spPr>
           <a:xfrm>
-            <a:off x="2124837" y="4169664"/>
+            <a:off x="2254649" y="4169664"/>
             <a:ext cx="685800" cy="384048"/>
           </a:xfrm>
           <a:prstGeom prst="rect">
@@ -15179,7 +15113,7 @@
         </p:nvSpPr>
         <p:spPr>
           <a:xfrm>
-            <a:off x="2124837" y="4169664"/>
+            <a:off x="2254649" y="4169664"/>
             <a:ext cx="685800" cy="384048"/>
           </a:xfrm>
           <a:prstGeom prst="rect">
@@ -15218,7 +15152,7 @@
         </p:nvSpPr>
         <p:spPr>
           <a:xfrm>
-            <a:off x="2124837" y="4572000"/>
+            <a:off x="2254649" y="4572000"/>
             <a:ext cx="685800" cy="219456"/>
           </a:xfrm>
           <a:prstGeom prst="rect">
@@ -15257,7 +15191,7 @@
         </p:nvSpPr>
         <p:spPr>
           <a:xfrm>
-            <a:off x="3033522" y="4169664"/>
+            <a:off x="3293146" y="4169664"/>
             <a:ext cx="685800" cy="384048"/>
           </a:xfrm>
           <a:prstGeom prst="rect">
@@ -15284,7 +15218,7 @@
         </p:nvSpPr>
         <p:spPr>
           <a:xfrm>
-            <a:off x="3033522" y="4169664"/>
+            <a:off x="3293146" y="4169664"/>
             <a:ext cx="685800" cy="384048"/>
           </a:xfrm>
           <a:prstGeom prst="rect">
@@ -15323,7 +15257,7 @@
         </p:nvSpPr>
         <p:spPr>
           <a:xfrm>
-            <a:off x="3942207" y="4169664"/>
+            <a:off x="4331643" y="4169664"/>
             <a:ext cx="685800" cy="384048"/>
           </a:xfrm>
           <a:prstGeom prst="rect">
@@ -15350,7 +15284,7 @@
         </p:nvSpPr>
         <p:spPr>
           <a:xfrm>
-            <a:off x="3942207" y="4169664"/>
+            <a:off x="4331643" y="4169664"/>
             <a:ext cx="685800" cy="384048"/>
           </a:xfrm>
           <a:prstGeom prst="rect">
@@ -15389,7 +15323,7 @@
         </p:nvSpPr>
         <p:spPr>
           <a:xfrm>
-            <a:off x="4850892" y="4169664"/>
+            <a:off x="5370141" y="4169664"/>
             <a:ext cx="685800" cy="384048"/>
           </a:xfrm>
           <a:prstGeom prst="rect">
@@ -15416,7 +15350,7 @@
         </p:nvSpPr>
         <p:spPr>
           <a:xfrm>
-            <a:off x="4850892" y="4169664"/>
+            <a:off x="5370141" y="4169664"/>
             <a:ext cx="685800" cy="384048"/>
           </a:xfrm>
           <a:prstGeom prst="rect">
@@ -15455,7 +15389,7 @@
         </p:nvSpPr>
         <p:spPr>
           <a:xfrm>
-            <a:off x="4850892" y="4572000"/>
+            <a:off x="5370141" y="4572000"/>
             <a:ext cx="685800" cy="219456"/>
           </a:xfrm>
           <a:prstGeom prst="rect">
@@ -15494,7 +15428,7 @@
         </p:nvSpPr>
         <p:spPr>
           <a:xfrm>
-            <a:off x="5759577" y="4169664"/>
+            <a:off x="6408638" y="4169664"/>
             <a:ext cx="685800" cy="384048"/>
           </a:xfrm>
           <a:prstGeom prst="rect">
@@ -15521,7 +15455,7 @@
         </p:nvSpPr>
         <p:spPr>
           <a:xfrm>
-            <a:off x="5759577" y="4169664"/>
+            <a:off x="6408638" y="4169664"/>
             <a:ext cx="685800" cy="384048"/>
           </a:xfrm>
           <a:prstGeom prst="rect">
@@ -15560,7 +15494,7 @@
         </p:nvSpPr>
         <p:spPr>
           <a:xfrm>
-            <a:off x="6668262" y="4169664"/>
+            <a:off x="7447135" y="4169664"/>
             <a:ext cx="685800" cy="384048"/>
           </a:xfrm>
           <a:prstGeom prst="rect">
@@ -15587,7 +15521,7 @@
         </p:nvSpPr>
         <p:spPr>
           <a:xfrm>
-            <a:off x="6668262" y="4169664"/>
+            <a:off x="7447135" y="4169664"/>
             <a:ext cx="685800" cy="384048"/>
           </a:xfrm>
           <a:prstGeom prst="rect">
@@ -15612,73 +15546,7 @@
                 <a:ea typeface="Trebuchet MS" pitchFamily="34" charset="-122"/>
                 <a:cs typeface="Trebuchet MS" pitchFamily="34" charset="-120"/>
               </a:rPr>
-              <a:t>d</a:t>
-            </a:r>
-            <a:endParaRPr lang="en-US" sz="900" dirty="0"/>
-          </a:p>
-        </p:txBody>
-      </p:sp>
-      <p:sp>
-        <p:nvSpPr>
-          <p:cNvPr id="47" name="Shape 45"/>
-          <p:cNvSpPr/>
-          <p:nvPr/>
-        </p:nvSpPr>
-        <p:spPr>
-          <a:xfrm>
-            <a:off x="7576947" y="4169664"/>
-            <a:ext cx="685800" cy="384048"/>
-          </a:xfrm>
-          <a:prstGeom prst="rect">
-            <a:avLst>
-              <a:gd name="adj" fmla="val 9524"/>
-            </a:avLst>
-          </a:prstGeom>
-          <a:solidFill>
-            <a:srgbClr val="FFFFFF"/>
-          </a:solidFill>
-          <a:ln w="12700">
-            <a:solidFill>
-              <a:srgbClr val="DB2777"/>
-            </a:solidFill>
-            <a:prstDash val="solid"/>
-          </a:ln>
-        </p:spPr>
-      </p:sp>
-      <p:sp>
-        <p:nvSpPr>
-          <p:cNvPr id="48" name="Text 46"/>
-          <p:cNvSpPr/>
-          <p:nvPr/>
-        </p:nvSpPr>
-        <p:spPr>
-          <a:xfrm>
-            <a:off x="7576947" y="4169664"/>
-            <a:ext cx="685800" cy="384048"/>
-          </a:xfrm>
-          <a:prstGeom prst="rect">
-            <a:avLst/>
-          </a:prstGeom>
-          <a:noFill/>
-          <a:ln/>
-        </p:spPr>
-        <p:txBody>
-          <a:bodyPr wrap="square" lIns="0" tIns="0" rIns="0" bIns="0" rtlCol="0" anchor="ctr"/>
-          <a:lstStyle/>
-          <a:p>
-            <a:pPr algn="ctr" indent="0" marL="0">
-              <a:buNone/>
-            </a:pPr>
-            <a:r>
-              <a:rPr lang="en-US" sz="900" b="1" dirty="0">
-                <a:solidFill>
-                  <a:srgbClr val="9D174D"/>
-                </a:solidFill>
-                <a:latin typeface="Trebuchet MS" pitchFamily="34" charset="0"/>
-                <a:ea typeface="Trebuchet MS" pitchFamily="34" charset="-122"/>
-                <a:cs typeface="Trebuchet MS" pitchFamily="34" charset="-120"/>
-              </a:rPr>
-              <a:t>e</a:t>
+              <a:t>de</a:t>
             </a:r>
             <a:endParaRPr lang="en-US" sz="900" dirty="0"/>
           </a:p>
@@ -17004,7 +16872,7 @@
                 <a:ea typeface="Calibri" pitchFamily="34" charset="-122"/>
                 <a:cs typeface="Calibri" pitchFamily="34" charset="-120"/>
               </a:rPr>
-              <a:t>The general had to </a:t>
+              <a:t>Before the vote, the leader said he would </a:t>
             </a:r>
             <a:pPr algn="l" indent="0" marL="0">
               <a:buNone/>
@@ -17021,7 +16889,7 @@
                 <a:ea typeface="Calibri" pitchFamily="34" charset="-122"/>
                 <a:cs typeface="Calibri" pitchFamily="34" charset="-120"/>
               </a:rPr>
-              <a:t>concede</a:t>
+              <a:t>secede</a:t>
             </a:r>
             <a:pPr algn="l" indent="0" marL="0">
               <a:buNone/>
@@ -17035,7 +16903,7 @@
                 <a:ea typeface="Calibri" pitchFamily="34" charset="-122"/>
                 <a:cs typeface="Calibri" pitchFamily="34" charset="-120"/>
               </a:rPr>
-              <a:t> defeat, and the region would </a:t>
+              <a:t>; however, the decision to </a:t>
             </a:r>
             <a:pPr algn="l" indent="0" marL="0">
               <a:buNone/>
@@ -17052,7 +16920,7 @@
                 <a:ea typeface="Calibri" pitchFamily="34" charset="-122"/>
                 <a:cs typeface="Calibri" pitchFamily="34" charset="-120"/>
               </a:rPr>
-              <a:t>secede</a:t>
+              <a:t>precede</a:t>
             </a:r>
             <a:pPr algn="l" indent="0" marL="0">
               <a:buNone/>
@@ -17066,118 +16934,343 @@
                 <a:ea typeface="Calibri" pitchFamily="34" charset="-122"/>
                 <a:cs typeface="Calibri" pitchFamily="34" charset="-120"/>
               </a:rPr>
-              <a:t>, but history will show that brave soldiers did </a:t>
-            </a:r>
+              <a:t> with talks meant they had to reconsider.</a:t>
+            </a:r>
+            <a:endParaRPr lang="en-US" sz="1800" dirty="0"/>
+          </a:p>
+        </p:txBody>
+      </p:sp>
+      <p:sp>
+        <p:nvSpPr>
+          <p:cNvPr id="13" name="Shape 11"/>
+          <p:cNvSpPr/>
+          <p:nvPr/>
+        </p:nvSpPr>
+        <p:spPr>
+          <a:xfrm>
+            <a:off x="365760" y="2852928"/>
+            <a:ext cx="8412480" cy="475488"/>
+          </a:xfrm>
+          <a:prstGeom prst="rect">
+            <a:avLst>
+              <a:gd name="adj" fmla="val 15385"/>
+            </a:avLst>
+          </a:prstGeom>
+          <a:solidFill>
+            <a:srgbClr val="CCFBF1"/>
+          </a:solidFill>
+          <a:ln w="12700">
+            <a:solidFill>
+              <a:srgbClr val="0D9488"/>
+            </a:solidFill>
+            <a:prstDash val="solid"/>
+          </a:ln>
+        </p:spPr>
+      </p:sp>
+      <p:sp>
+        <p:nvSpPr>
+          <p:cNvPr id="14" name="Text 12"/>
+          <p:cNvSpPr/>
+          <p:nvPr/>
+        </p:nvSpPr>
+        <p:spPr>
+          <a:xfrm>
+            <a:off x="502920" y="2852928"/>
+            <a:ext cx="8229600" cy="475488"/>
+          </a:xfrm>
+          <a:prstGeom prst="rect">
+            <a:avLst/>
+          </a:prstGeom>
+          <a:noFill/>
+          <a:ln/>
+        </p:spPr>
+        <p:txBody>
+          <a:bodyPr wrap="square" rtlCol="0" anchor="ctr"/>
+          <a:lstStyle/>
+          <a:p>
             <a:pPr algn="l" indent="0" marL="0">
               <a:buNone/>
             </a:pPr>
             <a:r>
-              <a:rPr lang="en-US" sz="1800" b="1" dirty="0">
-                <a:solidFill>
-                  <a:srgbClr val="0D9488"/>
-                </a:solidFill>
-                <a:highlight>
-                  <a:srgbClr val="CCFBF1"/>
-                </a:highlight>
+              <a:rPr lang="en-US" sz="1200" b="1" dirty="0">
+                <a:solidFill>
+                  <a:srgbClr val="0F766E"/>
+                </a:solidFill>
                 <a:latin typeface="Calibri" pitchFamily="34" charset="0"/>
                 <a:ea typeface="Calibri" pitchFamily="34" charset="-122"/>
                 <a:cs typeface="Calibri" pitchFamily="34" charset="-120"/>
               </a:rPr>
-              <a:t>precede</a:t>
-            </a:r>
-            <a:pPr algn="l" indent="0" marL="0">
-              <a:buNone/>
-            </a:pPr>
-            <a:r>
-              <a:rPr lang="en-US" sz="1800" dirty="0">
-                <a:solidFill>
-                  <a:srgbClr val="0F172A"/>
+              <a:t>Now rewrite each focus word below with space between letters — leave room for your breakdown.</a:t>
+            </a:r>
+            <a:endParaRPr lang="en-US" sz="1200" dirty="0"/>
+          </a:p>
+        </p:txBody>
+      </p:sp>
+      <p:sp>
+        <p:nvSpPr>
+          <p:cNvPr id="15" name="Shape 13"/>
+          <p:cNvSpPr/>
+          <p:nvPr/>
+        </p:nvSpPr>
+        <p:spPr>
+          <a:xfrm>
+            <a:off x="411480" y="3456432"/>
+            <a:ext cx="2499360" cy="1005840"/>
+          </a:xfrm>
+          <a:prstGeom prst="rect">
+            <a:avLst>
+              <a:gd name="adj" fmla="val 7273"/>
+            </a:avLst>
+          </a:prstGeom>
+          <a:solidFill>
+            <a:srgbClr val="F8FAFC"/>
+          </a:solidFill>
+          <a:ln w="12700">
+            <a:solidFill>
+              <a:srgbClr val="E2E8F0"/>
+            </a:solidFill>
+            <a:prstDash val="solid"/>
+          </a:ln>
+        </p:spPr>
+      </p:sp>
+      <p:sp>
+        <p:nvSpPr>
+          <p:cNvPr id="16" name="Shape 14"/>
+          <p:cNvSpPr/>
+          <p:nvPr/>
+        </p:nvSpPr>
+        <p:spPr>
+          <a:xfrm>
+            <a:off x="411480" y="3977640"/>
+            <a:ext cx="2499360" cy="0"/>
+          </a:xfrm>
+          <a:prstGeom prst="line">
+            <a:avLst/>
+          </a:prstGeom>
+          <a:noFill/>
+          <a:ln w="12700">
+            <a:solidFill>
+              <a:srgbClr val="E2E8F0"/>
+            </a:solidFill>
+            <a:prstDash val="dash"/>
+          </a:ln>
+        </p:spPr>
+      </p:sp>
+      <p:sp>
+        <p:nvSpPr>
+          <p:cNvPr id="17" name="Text 15"/>
+          <p:cNvSpPr/>
+          <p:nvPr/>
+        </p:nvSpPr>
+        <p:spPr>
+          <a:xfrm>
+            <a:off x="411480" y="3456432"/>
+            <a:ext cx="2499360" cy="502920"/>
+          </a:xfrm>
+          <a:prstGeom prst="rect">
+            <a:avLst/>
+          </a:prstGeom>
+          <a:noFill/>
+          <a:ln/>
+        </p:spPr>
+        <p:txBody>
+          <a:bodyPr wrap="square" lIns="0" tIns="0" rIns="0" bIns="0" rtlCol="0" anchor="ctr"/>
+          <a:lstStyle/>
+          <a:p>
+            <a:pPr algn="ctr" indent="0" marL="0">
+              <a:buNone/>
+            </a:pPr>
+            <a:r>
+              <a:rPr lang="en-US" sz="1400" b="1" dirty="0">
+                <a:solidFill>
+                  <a:srgbClr val="0D9488"/>
+                </a:solidFill>
+                <a:latin typeface="Trebuchet MS" pitchFamily="34" charset="0"/>
+                <a:ea typeface="Trebuchet MS" pitchFamily="34" charset="-122"/>
+                <a:cs typeface="Trebuchet MS" pitchFamily="34" charset="-120"/>
+              </a:rPr>
+              <a:t>secede</a:t>
+            </a:r>
+            <a:endParaRPr lang="en-US" sz="1400" dirty="0"/>
+          </a:p>
+        </p:txBody>
+      </p:sp>
+      <p:sp>
+        <p:nvSpPr>
+          <p:cNvPr id="18" name="Text 16"/>
+          <p:cNvSpPr/>
+          <p:nvPr/>
+        </p:nvSpPr>
+        <p:spPr>
+          <a:xfrm>
+            <a:off x="411480" y="4005072"/>
+            <a:ext cx="2499360" cy="457200"/>
+          </a:xfrm>
+          <a:prstGeom prst="rect">
+            <a:avLst/>
+          </a:prstGeom>
+          <a:noFill/>
+          <a:ln/>
+        </p:spPr>
+        <p:txBody>
+          <a:bodyPr wrap="square" lIns="0" tIns="0" rIns="0" bIns="0" rtlCol="0" anchor="ctr"/>
+          <a:lstStyle/>
+          <a:p>
+            <a:pPr algn="ctr" indent="0" marL="0">
+              <a:buNone/>
+            </a:pPr>
+            <a:r>
+              <a:rPr lang="en-US" sz="900" i="1" dirty="0">
+                <a:solidFill>
+                  <a:srgbClr val="475569"/>
                 </a:solidFill>
                 <a:latin typeface="Calibri" pitchFamily="34" charset="0"/>
                 <a:ea typeface="Calibri" pitchFamily="34" charset="-122"/>
                 <a:cs typeface="Calibri" pitchFamily="34" charset="-120"/>
               </a:rPr>
-              <a:t> them into battle.</a:t>
-            </a:r>
-            <a:endParaRPr lang="en-US" sz="1800" dirty="0"/>
-          </a:p>
-        </p:txBody>
-      </p:sp>
-      <p:sp>
-        <p:nvSpPr>
-          <p:cNvPr id="13" name="Shape 11"/>
-          <p:cNvSpPr/>
-          <p:nvPr/>
-        </p:nvSpPr>
-        <p:spPr>
-          <a:xfrm>
-            <a:off x="365760" y="2852928"/>
-            <a:ext cx="8412480" cy="475488"/>
+              <a:t>write your breakdown below</a:t>
+            </a:r>
+            <a:endParaRPr lang="en-US" sz="900" dirty="0"/>
+          </a:p>
+        </p:txBody>
+      </p:sp>
+      <p:sp>
+        <p:nvSpPr>
+          <p:cNvPr id="19" name="Shape 17"/>
+          <p:cNvSpPr/>
+          <p:nvPr/>
+        </p:nvSpPr>
+        <p:spPr>
+          <a:xfrm>
+            <a:off x="3185160" y="3456432"/>
+            <a:ext cx="2499360" cy="1005840"/>
           </a:xfrm>
           <a:prstGeom prst="rect">
             <a:avLst>
-              <a:gd name="adj" fmla="val 15385"/>
+              <a:gd name="adj" fmla="val 7273"/>
             </a:avLst>
           </a:prstGeom>
           <a:solidFill>
-            <a:srgbClr val="CCFBF1"/>
-          </a:solidFill>
-          <a:ln w="12700">
-            <a:solidFill>
-              <a:srgbClr val="0D9488"/>
-            </a:solidFill>
-            <a:prstDash val="solid"/>
-          </a:ln>
-        </p:spPr>
-      </p:sp>
-      <p:sp>
-        <p:nvSpPr>
-          <p:cNvPr id="14" name="Text 12"/>
-          <p:cNvSpPr/>
-          <p:nvPr/>
-        </p:nvSpPr>
-        <p:spPr>
-          <a:xfrm>
-            <a:off x="502920" y="2852928"/>
-            <a:ext cx="8229600" cy="475488"/>
-          </a:xfrm>
-          <a:prstGeom prst="rect">
-            <a:avLst/>
-          </a:prstGeom>
-          <a:noFill/>
-          <a:ln/>
-        </p:spPr>
-        <p:txBody>
-          <a:bodyPr wrap="square" rtlCol="0" anchor="ctr"/>
-          <a:lstStyle/>
-          <a:p>
-            <a:pPr algn="l" indent="0" marL="0">
-              <a:buNone/>
-            </a:pPr>
-            <a:r>
-              <a:rPr lang="en-US" sz="1200" b="1" dirty="0">
-                <a:solidFill>
-                  <a:srgbClr val="0F766E"/>
+            <a:srgbClr val="F8FAFC"/>
+          </a:solidFill>
+          <a:ln w="12700">
+            <a:solidFill>
+              <a:srgbClr val="E2E8F0"/>
+            </a:solidFill>
+            <a:prstDash val="solid"/>
+          </a:ln>
+        </p:spPr>
+      </p:sp>
+      <p:sp>
+        <p:nvSpPr>
+          <p:cNvPr id="20" name="Shape 18"/>
+          <p:cNvSpPr/>
+          <p:nvPr/>
+        </p:nvSpPr>
+        <p:spPr>
+          <a:xfrm>
+            <a:off x="3185160" y="3977640"/>
+            <a:ext cx="2499360" cy="0"/>
+          </a:xfrm>
+          <a:prstGeom prst="line">
+            <a:avLst/>
+          </a:prstGeom>
+          <a:noFill/>
+          <a:ln w="12700">
+            <a:solidFill>
+              <a:srgbClr val="E2E8F0"/>
+            </a:solidFill>
+            <a:prstDash val="dash"/>
+          </a:ln>
+        </p:spPr>
+      </p:sp>
+      <p:sp>
+        <p:nvSpPr>
+          <p:cNvPr id="21" name="Text 19"/>
+          <p:cNvSpPr/>
+          <p:nvPr/>
+        </p:nvSpPr>
+        <p:spPr>
+          <a:xfrm>
+            <a:off x="3185160" y="3456432"/>
+            <a:ext cx="2499360" cy="502920"/>
+          </a:xfrm>
+          <a:prstGeom prst="rect">
+            <a:avLst/>
+          </a:prstGeom>
+          <a:noFill/>
+          <a:ln/>
+        </p:spPr>
+        <p:txBody>
+          <a:bodyPr wrap="square" lIns="0" tIns="0" rIns="0" bIns="0" rtlCol="0" anchor="ctr"/>
+          <a:lstStyle/>
+          <a:p>
+            <a:pPr algn="ctr" indent="0" marL="0">
+              <a:buNone/>
+            </a:pPr>
+            <a:r>
+              <a:rPr lang="en-US" sz="1400" b="1" dirty="0">
+                <a:solidFill>
+                  <a:srgbClr val="0D9488"/>
+                </a:solidFill>
+                <a:latin typeface="Trebuchet MS" pitchFamily="34" charset="0"/>
+                <a:ea typeface="Trebuchet MS" pitchFamily="34" charset="-122"/>
+                <a:cs typeface="Trebuchet MS" pitchFamily="34" charset="-120"/>
+              </a:rPr>
+              <a:t>precede</a:t>
+            </a:r>
+            <a:endParaRPr lang="en-US" sz="1400" dirty="0"/>
+          </a:p>
+        </p:txBody>
+      </p:sp>
+      <p:sp>
+        <p:nvSpPr>
+          <p:cNvPr id="22" name="Text 20"/>
+          <p:cNvSpPr/>
+          <p:nvPr/>
+        </p:nvSpPr>
+        <p:spPr>
+          <a:xfrm>
+            <a:off x="3185160" y="4005072"/>
+            <a:ext cx="2499360" cy="457200"/>
+          </a:xfrm>
+          <a:prstGeom prst="rect">
+            <a:avLst/>
+          </a:prstGeom>
+          <a:noFill/>
+          <a:ln/>
+        </p:spPr>
+        <p:txBody>
+          <a:bodyPr wrap="square" lIns="0" tIns="0" rIns="0" bIns="0" rtlCol="0" anchor="ctr"/>
+          <a:lstStyle/>
+          <a:p>
+            <a:pPr algn="ctr" indent="0" marL="0">
+              <a:buNone/>
+            </a:pPr>
+            <a:r>
+              <a:rPr lang="en-US" sz="900" i="1" dirty="0">
+                <a:solidFill>
+                  <a:srgbClr val="475569"/>
                 </a:solidFill>
                 <a:latin typeface="Calibri" pitchFamily="34" charset="0"/>
                 <a:ea typeface="Calibri" pitchFamily="34" charset="-122"/>
                 <a:cs typeface="Calibri" pitchFamily="34" charset="-120"/>
               </a:rPr>
-              <a:t>Now rewrite each focus word below with space between letters — leave room for your breakdown.</a:t>
-            </a:r>
-            <a:endParaRPr lang="en-US" sz="1200" dirty="0"/>
-          </a:p>
-        </p:txBody>
-      </p:sp>
-      <p:sp>
-        <p:nvSpPr>
-          <p:cNvPr id="15" name="Shape 13"/>
-          <p:cNvSpPr/>
-          <p:nvPr/>
-        </p:nvSpPr>
-        <p:spPr>
-          <a:xfrm>
-            <a:off x="411480" y="3456432"/>
+              <a:t>write your breakdown below</a:t>
+            </a:r>
+            <a:endParaRPr lang="en-US" sz="900" dirty="0"/>
+          </a:p>
+        </p:txBody>
+      </p:sp>
+      <p:sp>
+        <p:nvSpPr>
+          <p:cNvPr id="23" name="Shape 21"/>
+          <p:cNvSpPr/>
+          <p:nvPr/>
+        </p:nvSpPr>
+        <p:spPr>
+          <a:xfrm>
+            <a:off x="5958840" y="3456432"/>
             <a:ext cx="2499360" cy="1005840"/>
           </a:xfrm>
           <a:prstGeom prst="rect">
@@ -17198,13 +17291,13 @@
       </p:sp>
       <p:sp>
         <p:nvSpPr>
-          <p:cNvPr id="16" name="Shape 14"/>
-          <p:cNvSpPr/>
-          <p:nvPr/>
-        </p:nvSpPr>
-        <p:spPr>
-          <a:xfrm>
-            <a:off x="411480" y="3977640"/>
+          <p:cNvPr id="24" name="Shape 22"/>
+          <p:cNvSpPr/>
+          <p:nvPr/>
+        </p:nvSpPr>
+        <p:spPr>
+          <a:xfrm>
+            <a:off x="5958840" y="3977640"/>
             <a:ext cx="2499360" cy="0"/>
           </a:xfrm>
           <a:prstGeom prst="line">
@@ -17221,13 +17314,13 @@
       </p:sp>
       <p:sp>
         <p:nvSpPr>
-          <p:cNvPr id="17" name="Text 15"/>
-          <p:cNvSpPr/>
-          <p:nvPr/>
-        </p:nvSpPr>
-        <p:spPr>
-          <a:xfrm>
-            <a:off x="411480" y="3456432"/>
+          <p:cNvPr id="25" name="Text 23"/>
+          <p:cNvSpPr/>
+          <p:nvPr/>
+        </p:nvSpPr>
+        <p:spPr>
+          <a:xfrm>
+            <a:off x="5958840" y="3456432"/>
             <a:ext cx="2499360" cy="502920"/>
           </a:xfrm>
           <a:prstGeom prst="rect">
@@ -17252,263 +17345,7 @@
                 <a:ea typeface="Trebuchet MS" pitchFamily="34" charset="-122"/>
                 <a:cs typeface="Trebuchet MS" pitchFamily="34" charset="-120"/>
               </a:rPr>
-              <a:t>concede</a:t>
-            </a:r>
-            <a:endParaRPr lang="en-US" sz="1400" dirty="0"/>
-          </a:p>
-        </p:txBody>
-      </p:sp>
-      <p:sp>
-        <p:nvSpPr>
-          <p:cNvPr id="18" name="Text 16"/>
-          <p:cNvSpPr/>
-          <p:nvPr/>
-        </p:nvSpPr>
-        <p:spPr>
-          <a:xfrm>
-            <a:off x="411480" y="4005072"/>
-            <a:ext cx="2499360" cy="457200"/>
-          </a:xfrm>
-          <a:prstGeom prst="rect">
-            <a:avLst/>
-          </a:prstGeom>
-          <a:noFill/>
-          <a:ln/>
-        </p:spPr>
-        <p:txBody>
-          <a:bodyPr wrap="square" lIns="0" tIns="0" rIns="0" bIns="0" rtlCol="0" anchor="ctr"/>
-          <a:lstStyle/>
-          <a:p>
-            <a:pPr algn="ctr" indent="0" marL="0">
-              <a:buNone/>
-            </a:pPr>
-            <a:r>
-              <a:rPr lang="en-US" sz="900" i="1" dirty="0">
-                <a:solidFill>
-                  <a:srgbClr val="475569"/>
-                </a:solidFill>
-                <a:latin typeface="Calibri" pitchFamily="34" charset="0"/>
-                <a:ea typeface="Calibri" pitchFamily="34" charset="-122"/>
-                <a:cs typeface="Calibri" pitchFamily="34" charset="-120"/>
-              </a:rPr>
-              <a:t>write your breakdown below</a:t>
-            </a:r>
-            <a:endParaRPr lang="en-US" sz="900" dirty="0"/>
-          </a:p>
-        </p:txBody>
-      </p:sp>
-      <p:sp>
-        <p:nvSpPr>
-          <p:cNvPr id="19" name="Shape 17"/>
-          <p:cNvSpPr/>
-          <p:nvPr/>
-        </p:nvSpPr>
-        <p:spPr>
-          <a:xfrm>
-            <a:off x="3185160" y="3456432"/>
-            <a:ext cx="2499360" cy="1005840"/>
-          </a:xfrm>
-          <a:prstGeom prst="rect">
-            <a:avLst>
-              <a:gd name="adj" fmla="val 7273"/>
-            </a:avLst>
-          </a:prstGeom>
-          <a:solidFill>
-            <a:srgbClr val="F8FAFC"/>
-          </a:solidFill>
-          <a:ln w="12700">
-            <a:solidFill>
-              <a:srgbClr val="E2E8F0"/>
-            </a:solidFill>
-            <a:prstDash val="solid"/>
-          </a:ln>
-        </p:spPr>
-      </p:sp>
-      <p:sp>
-        <p:nvSpPr>
-          <p:cNvPr id="20" name="Shape 18"/>
-          <p:cNvSpPr/>
-          <p:nvPr/>
-        </p:nvSpPr>
-        <p:spPr>
-          <a:xfrm>
-            <a:off x="3185160" y="3977640"/>
-            <a:ext cx="2499360" cy="0"/>
-          </a:xfrm>
-          <a:prstGeom prst="line">
-            <a:avLst/>
-          </a:prstGeom>
-          <a:noFill/>
-          <a:ln w="12700">
-            <a:solidFill>
-              <a:srgbClr val="E2E8F0"/>
-            </a:solidFill>
-            <a:prstDash val="dash"/>
-          </a:ln>
-        </p:spPr>
-      </p:sp>
-      <p:sp>
-        <p:nvSpPr>
-          <p:cNvPr id="21" name="Text 19"/>
-          <p:cNvSpPr/>
-          <p:nvPr/>
-        </p:nvSpPr>
-        <p:spPr>
-          <a:xfrm>
-            <a:off x="3185160" y="3456432"/>
-            <a:ext cx="2499360" cy="502920"/>
-          </a:xfrm>
-          <a:prstGeom prst="rect">
-            <a:avLst/>
-          </a:prstGeom>
-          <a:noFill/>
-          <a:ln/>
-        </p:spPr>
-        <p:txBody>
-          <a:bodyPr wrap="square" lIns="0" tIns="0" rIns="0" bIns="0" rtlCol="0" anchor="ctr"/>
-          <a:lstStyle/>
-          <a:p>
-            <a:pPr algn="ctr" indent="0" marL="0">
-              <a:buNone/>
-            </a:pPr>
-            <a:r>
-              <a:rPr lang="en-US" sz="1400" b="1" dirty="0">
-                <a:solidFill>
-                  <a:srgbClr val="0D9488"/>
-                </a:solidFill>
-                <a:latin typeface="Trebuchet MS" pitchFamily="34" charset="0"/>
-                <a:ea typeface="Trebuchet MS" pitchFamily="34" charset="-122"/>
-                <a:cs typeface="Trebuchet MS" pitchFamily="34" charset="-120"/>
-              </a:rPr>
-              <a:t>secede</a:t>
-            </a:r>
-            <a:endParaRPr lang="en-US" sz="1400" dirty="0"/>
-          </a:p>
-        </p:txBody>
-      </p:sp>
-      <p:sp>
-        <p:nvSpPr>
-          <p:cNvPr id="22" name="Text 20"/>
-          <p:cNvSpPr/>
-          <p:nvPr/>
-        </p:nvSpPr>
-        <p:spPr>
-          <a:xfrm>
-            <a:off x="3185160" y="4005072"/>
-            <a:ext cx="2499360" cy="457200"/>
-          </a:xfrm>
-          <a:prstGeom prst="rect">
-            <a:avLst/>
-          </a:prstGeom>
-          <a:noFill/>
-          <a:ln/>
-        </p:spPr>
-        <p:txBody>
-          <a:bodyPr wrap="square" lIns="0" tIns="0" rIns="0" bIns="0" rtlCol="0" anchor="ctr"/>
-          <a:lstStyle/>
-          <a:p>
-            <a:pPr algn="ctr" indent="0" marL="0">
-              <a:buNone/>
-            </a:pPr>
-            <a:r>
-              <a:rPr lang="en-US" sz="900" i="1" dirty="0">
-                <a:solidFill>
-                  <a:srgbClr val="475569"/>
-                </a:solidFill>
-                <a:latin typeface="Calibri" pitchFamily="34" charset="0"/>
-                <a:ea typeface="Calibri" pitchFamily="34" charset="-122"/>
-                <a:cs typeface="Calibri" pitchFamily="34" charset="-120"/>
-              </a:rPr>
-              <a:t>write your breakdown below</a:t>
-            </a:r>
-            <a:endParaRPr lang="en-US" sz="900" dirty="0"/>
-          </a:p>
-        </p:txBody>
-      </p:sp>
-      <p:sp>
-        <p:nvSpPr>
-          <p:cNvPr id="23" name="Shape 21"/>
-          <p:cNvSpPr/>
-          <p:nvPr/>
-        </p:nvSpPr>
-        <p:spPr>
-          <a:xfrm>
-            <a:off x="5958840" y="3456432"/>
-            <a:ext cx="2499360" cy="1005840"/>
-          </a:xfrm>
-          <a:prstGeom prst="rect">
-            <a:avLst>
-              <a:gd name="adj" fmla="val 7273"/>
-            </a:avLst>
-          </a:prstGeom>
-          <a:solidFill>
-            <a:srgbClr val="F8FAFC"/>
-          </a:solidFill>
-          <a:ln w="12700">
-            <a:solidFill>
-              <a:srgbClr val="E2E8F0"/>
-            </a:solidFill>
-            <a:prstDash val="solid"/>
-          </a:ln>
-        </p:spPr>
-      </p:sp>
-      <p:sp>
-        <p:nvSpPr>
-          <p:cNvPr id="24" name="Shape 22"/>
-          <p:cNvSpPr/>
-          <p:nvPr/>
-        </p:nvSpPr>
-        <p:spPr>
-          <a:xfrm>
-            <a:off x="5958840" y="3977640"/>
-            <a:ext cx="2499360" cy="0"/>
-          </a:xfrm>
-          <a:prstGeom prst="line">
-            <a:avLst/>
-          </a:prstGeom>
-          <a:noFill/>
-          <a:ln w="12700">
-            <a:solidFill>
-              <a:srgbClr val="E2E8F0"/>
-            </a:solidFill>
-            <a:prstDash val="dash"/>
-          </a:ln>
-        </p:spPr>
-      </p:sp>
-      <p:sp>
-        <p:nvSpPr>
-          <p:cNvPr id="25" name="Text 23"/>
-          <p:cNvSpPr/>
-          <p:nvPr/>
-        </p:nvSpPr>
-        <p:spPr>
-          <a:xfrm>
-            <a:off x="5958840" y="3456432"/>
-            <a:ext cx="2499360" cy="502920"/>
-          </a:xfrm>
-          <a:prstGeom prst="rect">
-            <a:avLst/>
-          </a:prstGeom>
-          <a:noFill/>
-          <a:ln/>
-        </p:spPr>
-        <p:txBody>
-          <a:bodyPr wrap="square" lIns="0" tIns="0" rIns="0" bIns="0" rtlCol="0" anchor="ctr"/>
-          <a:lstStyle/>
-          <a:p>
-            <a:pPr algn="ctr" indent="0" marL="0">
-              <a:buNone/>
-            </a:pPr>
-            <a:r>
-              <a:rPr lang="en-US" sz="1400" b="1" dirty="0">
-                <a:solidFill>
-                  <a:srgbClr val="0D9488"/>
-                </a:solidFill>
-                <a:latin typeface="Trebuchet MS" pitchFamily="34" charset="0"/>
-                <a:ea typeface="Trebuchet MS" pitchFamily="34" charset="-122"/>
-                <a:cs typeface="Trebuchet MS" pitchFamily="34" charset="-120"/>
-              </a:rPr>
-              <a:t>precede</a:t>
+              <a:t>preceded</a:t>
             </a:r>
             <a:endParaRPr lang="en-US" sz="1400" dirty="0"/>
           </a:p>
@@ -17978,7 +17815,7 @@
                 <a:ea typeface="Trebuchet MS" pitchFamily="34" charset="-122"/>
                 <a:cs typeface="Trebuchet MS" pitchFamily="34" charset="-120"/>
               </a:rPr>
-              <a:t>concede</a:t>
+              <a:t>secede</a:t>
             </a:r>
             <a:endParaRPr lang="en-US" sz="2800" dirty="0"/>
           </a:p>
@@ -18805,7 +18642,7 @@
                 <a:ea typeface="Trebuchet MS" pitchFamily="34" charset="-122"/>
                 <a:cs typeface="Trebuchet MS" pitchFamily="34" charset="-120"/>
               </a:rPr>
-              <a:t>concede</a:t>
+              <a:t>secede</a:t>
             </a:r>
             <a:endParaRPr lang="en-US" sz="2800" dirty="0"/>
           </a:p>
@@ -18944,7 +18781,7 @@
                 <a:ea typeface="Trebuchet MS" pitchFamily="34" charset="-122"/>
                 <a:cs typeface="Trebuchet MS" pitchFamily="34" charset="-120"/>
               </a:rPr>
-              <a:t>con</a:t>
+              <a:t>se</a:t>
             </a:r>
             <a:endParaRPr lang="en-US" sz="1300" dirty="0"/>
           </a:p>
@@ -18983,7 +18820,7 @@
                 <a:ea typeface="Calibri" pitchFamily="34" charset="-122"/>
                 <a:cs typeface="Calibri" pitchFamily="34" charset="-120"/>
               </a:rPr>
-              <a:t>together, with</a:t>
+              <a:t>apart, away</a:t>
             </a:r>
             <a:endParaRPr lang="en-US" sz="850" dirty="0"/>
           </a:p>
@@ -19790,7 +19627,7 @@
                 <a:ea typeface="Trebuchet MS" pitchFamily="34" charset="-122"/>
                 <a:cs typeface="Trebuchet MS" pitchFamily="34" charset="-120"/>
               </a:rPr>
-              <a:t>concede</a:t>
+              <a:t>secede</a:t>
             </a:r>
             <a:endParaRPr lang="en-US" sz="2800" dirty="0"/>
           </a:p>
@@ -19929,7 +19766,7 @@
                 <a:ea typeface="Trebuchet MS" pitchFamily="34" charset="-122"/>
                 <a:cs typeface="Trebuchet MS" pitchFamily="34" charset="-120"/>
               </a:rPr>
-              <a:t>con</a:t>
+              <a:t>se</a:t>
             </a:r>
             <a:endParaRPr lang="en-US" sz="1300" dirty="0"/>
           </a:p>
@@ -19968,7 +19805,7 @@
                 <a:ea typeface="Calibri" pitchFamily="34" charset="-122"/>
                 <a:cs typeface="Calibri" pitchFamily="34" charset="-120"/>
               </a:rPr>
-              <a:t>together, with</a:t>
+              <a:t>apart, away</a:t>
             </a:r>
             <a:endParaRPr lang="en-US" sz="850" dirty="0"/>
           </a:p>
@@ -20239,7 +20076,7 @@
                 <a:ea typeface="Trebuchet MS" pitchFamily="34" charset="-122"/>
                 <a:cs typeface="Trebuchet MS" pitchFamily="34" charset="-120"/>
               </a:rPr>
-              <a:t>con</a:t>
+              <a:t>se</a:t>
             </a:r>
             <a:endParaRPr lang="en-US" sz="1400" dirty="0"/>
           </a:p>
@@ -20907,7 +20744,7 @@
                 <a:ea typeface="Trebuchet MS" pitchFamily="34" charset="-122"/>
                 <a:cs typeface="Trebuchet MS" pitchFamily="34" charset="-120"/>
               </a:rPr>
-              <a:t>concede</a:t>
+              <a:t>secede</a:t>
             </a:r>
             <a:endParaRPr lang="en-US" sz="2800" dirty="0"/>
           </a:p>
@@ -21046,7 +20883,7 @@
                 <a:ea typeface="Trebuchet MS" pitchFamily="34" charset="-122"/>
                 <a:cs typeface="Trebuchet MS" pitchFamily="34" charset="-120"/>
               </a:rPr>
-              <a:t>con</a:t>
+              <a:t>se</a:t>
             </a:r>
             <a:endParaRPr lang="en-US" sz="1300" dirty="0"/>
           </a:p>
@@ -21085,7 +20922,7 @@
                 <a:ea typeface="Calibri" pitchFamily="34" charset="-122"/>
                 <a:cs typeface="Calibri" pitchFamily="34" charset="-120"/>
               </a:rPr>
-              <a:t>together, with</a:t>
+              <a:t>apart, away</a:t>
             </a:r>
             <a:endParaRPr lang="en-US" sz="850" dirty="0"/>
           </a:p>
@@ -21356,7 +21193,7 @@
                 <a:ea typeface="Trebuchet MS" pitchFamily="34" charset="-122"/>
                 <a:cs typeface="Trebuchet MS" pitchFamily="34" charset="-120"/>
               </a:rPr>
-              <a:t>con</a:t>
+              <a:t>se</a:t>
             </a:r>
             <a:endParaRPr lang="en-US" sz="1400" dirty="0"/>
           </a:p>
@@ -21568,7 +21405,7 @@
         </p:nvSpPr>
         <p:spPr>
           <a:xfrm>
-            <a:off x="2124837" y="4169664"/>
+            <a:off x="2427732" y="4169664"/>
             <a:ext cx="685800" cy="384048"/>
           </a:xfrm>
           <a:prstGeom prst="rect">
@@ -21595,7 +21432,7 @@
         </p:nvSpPr>
         <p:spPr>
           <a:xfrm>
-            <a:off x="2124837" y="4169664"/>
+            <a:off x="2427732" y="4169664"/>
             <a:ext cx="685800" cy="384048"/>
           </a:xfrm>
           <a:prstGeom prst="rect">
@@ -21620,6 +21457,138 @@
                 <a:ea typeface="Trebuchet MS" pitchFamily="34" charset="-122"/>
                 <a:cs typeface="Trebuchet MS" pitchFamily="34" charset="-120"/>
               </a:rPr>
+              <a:t>s</a:t>
+            </a:r>
+            <a:endParaRPr lang="en-US" sz="900" dirty="0"/>
+          </a:p>
+        </p:txBody>
+      </p:sp>
+      <p:sp>
+        <p:nvSpPr>
+          <p:cNvPr id="35" name="Shape 33"/>
+          <p:cNvSpPr/>
+          <p:nvPr/>
+        </p:nvSpPr>
+        <p:spPr>
+          <a:xfrm>
+            <a:off x="3639312" y="4169664"/>
+            <a:ext cx="685800" cy="384048"/>
+          </a:xfrm>
+          <a:prstGeom prst="rect">
+            <a:avLst>
+              <a:gd name="adj" fmla="val 9524"/>
+            </a:avLst>
+          </a:prstGeom>
+          <a:solidFill>
+            <a:srgbClr val="FFFFFF"/>
+          </a:solidFill>
+          <a:ln w="12700">
+            <a:solidFill>
+              <a:srgbClr val="DB2777"/>
+            </a:solidFill>
+            <a:prstDash val="solid"/>
+          </a:ln>
+        </p:spPr>
+      </p:sp>
+      <p:sp>
+        <p:nvSpPr>
+          <p:cNvPr id="36" name="Text 34"/>
+          <p:cNvSpPr/>
+          <p:nvPr/>
+        </p:nvSpPr>
+        <p:spPr>
+          <a:xfrm>
+            <a:off x="3639312" y="4169664"/>
+            <a:ext cx="685800" cy="384048"/>
+          </a:xfrm>
+          <a:prstGeom prst="rect">
+            <a:avLst/>
+          </a:prstGeom>
+          <a:noFill/>
+          <a:ln/>
+        </p:spPr>
+        <p:txBody>
+          <a:bodyPr wrap="square" lIns="0" tIns="0" rIns="0" bIns="0" rtlCol="0" anchor="ctr"/>
+          <a:lstStyle/>
+          <a:p>
+            <a:pPr algn="ctr" indent="0" marL="0">
+              <a:buNone/>
+            </a:pPr>
+            <a:r>
+              <a:rPr lang="en-US" sz="900" b="1" dirty="0">
+                <a:solidFill>
+                  <a:srgbClr val="9D174D"/>
+                </a:solidFill>
+                <a:latin typeface="Trebuchet MS" pitchFamily="34" charset="0"/>
+                <a:ea typeface="Trebuchet MS" pitchFamily="34" charset="-122"/>
+                <a:cs typeface="Trebuchet MS" pitchFamily="34" charset="-120"/>
+              </a:rPr>
+              <a:t>e</a:t>
+            </a:r>
+            <a:endParaRPr lang="en-US" sz="900" dirty="0"/>
+          </a:p>
+        </p:txBody>
+      </p:sp>
+      <p:sp>
+        <p:nvSpPr>
+          <p:cNvPr id="37" name="Shape 35"/>
+          <p:cNvSpPr/>
+          <p:nvPr/>
+        </p:nvSpPr>
+        <p:spPr>
+          <a:xfrm>
+            <a:off x="4850892" y="4169664"/>
+            <a:ext cx="685800" cy="384048"/>
+          </a:xfrm>
+          <a:prstGeom prst="rect">
+            <a:avLst>
+              <a:gd name="adj" fmla="val 9524"/>
+            </a:avLst>
+          </a:prstGeom>
+          <a:solidFill>
+            <a:srgbClr val="FFFFFF"/>
+          </a:solidFill>
+          <a:ln w="12700">
+            <a:solidFill>
+              <a:srgbClr val="DB2777"/>
+            </a:solidFill>
+            <a:prstDash val="solid"/>
+          </a:ln>
+        </p:spPr>
+      </p:sp>
+      <p:sp>
+        <p:nvSpPr>
+          <p:cNvPr id="38" name="Text 36"/>
+          <p:cNvSpPr/>
+          <p:nvPr/>
+        </p:nvSpPr>
+        <p:spPr>
+          <a:xfrm>
+            <a:off x="4850892" y="4169664"/>
+            <a:ext cx="685800" cy="384048"/>
+          </a:xfrm>
+          <a:prstGeom prst="rect">
+            <a:avLst/>
+          </a:prstGeom>
+          <a:noFill/>
+          <a:ln/>
+        </p:spPr>
+        <p:txBody>
+          <a:bodyPr wrap="square" lIns="0" tIns="0" rIns="0" bIns="0" rtlCol="0" anchor="ctr"/>
+          <a:lstStyle/>
+          <a:p>
+            <a:pPr algn="ctr" indent="0" marL="0">
+              <a:buNone/>
+            </a:pPr>
+            <a:r>
+              <a:rPr lang="en-US" sz="900" b="1" dirty="0">
+                <a:solidFill>
+                  <a:srgbClr val="9D174D"/>
+                </a:solidFill>
+                <a:latin typeface="Trebuchet MS" pitchFamily="34" charset="0"/>
+                <a:ea typeface="Trebuchet MS" pitchFamily="34" charset="-122"/>
+                <a:cs typeface="Trebuchet MS" pitchFamily="34" charset="-120"/>
+              </a:rPr>
               <a:t>c</a:t>
             </a:r>
             <a:endParaRPr lang="en-US" sz="900" dirty="0"/>
@@ -21628,13 +21597,13 @@
       </p:sp>
       <p:sp>
         <p:nvSpPr>
-          <p:cNvPr id="35" name="Text 33"/>
-          <p:cNvSpPr/>
-          <p:nvPr/>
-        </p:nvSpPr>
-        <p:spPr>
-          <a:xfrm>
-            <a:off x="2124837" y="4572000"/>
+          <p:cNvPr id="39" name="Text 37"/>
+          <p:cNvSpPr/>
+          <p:nvPr/>
+        </p:nvSpPr>
+        <p:spPr>
+          <a:xfrm>
+            <a:off x="4850892" y="4572000"/>
             <a:ext cx="685800" cy="219456"/>
           </a:xfrm>
           <a:prstGeom prst="rect">
@@ -21659,7 +21628,7 @@
                 <a:ea typeface="Calibri" pitchFamily="34" charset="-122"/>
                 <a:cs typeface="Calibri" pitchFamily="34" charset="-120"/>
               </a:rPr>
-              <a:t>/k/</a:t>
+              <a:t>/s/</a:t>
             </a:r>
             <a:endParaRPr lang="en-US" sz="750" dirty="0"/>
           </a:p>
@@ -21667,13 +21636,13 @@
       </p:sp>
       <p:sp>
         <p:nvSpPr>
-          <p:cNvPr id="36" name="Shape 34"/>
-          <p:cNvSpPr/>
-          <p:nvPr/>
-        </p:nvSpPr>
-        <p:spPr>
-          <a:xfrm>
-            <a:off x="3033522" y="4169664"/>
+          <p:cNvPr id="40" name="Shape 38"/>
+          <p:cNvSpPr/>
+          <p:nvPr/>
+        </p:nvSpPr>
+        <p:spPr>
+          <a:xfrm>
+            <a:off x="6062472" y="4169664"/>
             <a:ext cx="685800" cy="384048"/>
           </a:xfrm>
           <a:prstGeom prst="rect">
@@ -21694,13 +21663,13 @@
       </p:sp>
       <p:sp>
         <p:nvSpPr>
-          <p:cNvPr id="37" name="Text 35"/>
-          <p:cNvSpPr/>
-          <p:nvPr/>
-        </p:nvSpPr>
-        <p:spPr>
-          <a:xfrm>
-            <a:off x="3033522" y="4169664"/>
+          <p:cNvPr id="41" name="Text 39"/>
+          <p:cNvSpPr/>
+          <p:nvPr/>
+        </p:nvSpPr>
+        <p:spPr>
+          <a:xfrm>
+            <a:off x="6062472" y="4169664"/>
             <a:ext cx="685800" cy="384048"/>
           </a:xfrm>
           <a:prstGeom prst="rect">
@@ -21725,7 +21694,7 @@
                 <a:ea typeface="Trebuchet MS" pitchFamily="34" charset="-122"/>
                 <a:cs typeface="Trebuchet MS" pitchFamily="34" charset="-120"/>
               </a:rPr>
-              <a:t>o</a:t>
+              <a:t>e</a:t>
             </a:r>
             <a:endParaRPr lang="en-US" sz="900" dirty="0"/>
           </a:p>
@@ -21733,13 +21702,13 @@
       </p:sp>
       <p:sp>
         <p:nvSpPr>
-          <p:cNvPr id="38" name="Shape 36"/>
-          <p:cNvSpPr/>
-          <p:nvPr/>
-        </p:nvSpPr>
-        <p:spPr>
-          <a:xfrm>
-            <a:off x="3942207" y="4169664"/>
+          <p:cNvPr id="42" name="Shape 40"/>
+          <p:cNvSpPr/>
+          <p:nvPr/>
+        </p:nvSpPr>
+        <p:spPr>
+          <a:xfrm>
+            <a:off x="7274052" y="4169664"/>
             <a:ext cx="685800" cy="384048"/>
           </a:xfrm>
           <a:prstGeom prst="rect">
@@ -21760,13 +21729,13 @@
       </p:sp>
       <p:sp>
         <p:nvSpPr>
-          <p:cNvPr id="39" name="Text 37"/>
-          <p:cNvSpPr/>
-          <p:nvPr/>
-        </p:nvSpPr>
-        <p:spPr>
-          <a:xfrm>
-            <a:off x="3942207" y="4169664"/>
+          <p:cNvPr id="43" name="Text 41"/>
+          <p:cNvSpPr/>
+          <p:nvPr/>
+        </p:nvSpPr>
+        <p:spPr>
+          <a:xfrm>
+            <a:off x="7274052" y="4169664"/>
             <a:ext cx="685800" cy="384048"/>
           </a:xfrm>
           <a:prstGeom prst="rect">
@@ -21791,310 +21760,7 @@
                 <a:ea typeface="Trebuchet MS" pitchFamily="34" charset="-122"/>
                 <a:cs typeface="Trebuchet MS" pitchFamily="34" charset="-120"/>
               </a:rPr>
-              <a:t>n</a:t>
-            </a:r>
-            <a:endParaRPr lang="en-US" sz="900" dirty="0"/>
-          </a:p>
-        </p:txBody>
-      </p:sp>
-      <p:sp>
-        <p:nvSpPr>
-          <p:cNvPr id="40" name="Shape 38"/>
-          <p:cNvSpPr/>
-          <p:nvPr/>
-        </p:nvSpPr>
-        <p:spPr>
-          <a:xfrm>
-            <a:off x="4850892" y="4169664"/>
-            <a:ext cx="685800" cy="384048"/>
-          </a:xfrm>
-          <a:prstGeom prst="rect">
-            <a:avLst>
-              <a:gd name="adj" fmla="val 9524"/>
-            </a:avLst>
-          </a:prstGeom>
-          <a:solidFill>
-            <a:srgbClr val="FFFFFF"/>
-          </a:solidFill>
-          <a:ln w="12700">
-            <a:solidFill>
-              <a:srgbClr val="DB2777"/>
-            </a:solidFill>
-            <a:prstDash val="solid"/>
-          </a:ln>
-        </p:spPr>
-      </p:sp>
-      <p:sp>
-        <p:nvSpPr>
-          <p:cNvPr id="41" name="Text 39"/>
-          <p:cNvSpPr/>
-          <p:nvPr/>
-        </p:nvSpPr>
-        <p:spPr>
-          <a:xfrm>
-            <a:off x="4850892" y="4169664"/>
-            <a:ext cx="685800" cy="384048"/>
-          </a:xfrm>
-          <a:prstGeom prst="rect">
-            <a:avLst/>
-          </a:prstGeom>
-          <a:noFill/>
-          <a:ln/>
-        </p:spPr>
-        <p:txBody>
-          <a:bodyPr wrap="square" lIns="0" tIns="0" rIns="0" bIns="0" rtlCol="0" anchor="ctr"/>
-          <a:lstStyle/>
-          <a:p>
-            <a:pPr algn="ctr" indent="0" marL="0">
-              <a:buNone/>
-            </a:pPr>
-            <a:r>
-              <a:rPr lang="en-US" sz="900" b="1" dirty="0">
-                <a:solidFill>
-                  <a:srgbClr val="9D174D"/>
-                </a:solidFill>
-                <a:latin typeface="Trebuchet MS" pitchFamily="34" charset="0"/>
-                <a:ea typeface="Trebuchet MS" pitchFamily="34" charset="-122"/>
-                <a:cs typeface="Trebuchet MS" pitchFamily="34" charset="-120"/>
-              </a:rPr>
-              <a:t>c</a:t>
-            </a:r>
-            <a:endParaRPr lang="en-US" sz="900" dirty="0"/>
-          </a:p>
-        </p:txBody>
-      </p:sp>
-      <p:sp>
-        <p:nvSpPr>
-          <p:cNvPr id="42" name="Text 40"/>
-          <p:cNvSpPr/>
-          <p:nvPr/>
-        </p:nvSpPr>
-        <p:spPr>
-          <a:xfrm>
-            <a:off x="4850892" y="4572000"/>
-            <a:ext cx="685800" cy="219456"/>
-          </a:xfrm>
-          <a:prstGeom prst="rect">
-            <a:avLst/>
-          </a:prstGeom>
-          <a:noFill/>
-          <a:ln/>
-        </p:spPr>
-        <p:txBody>
-          <a:bodyPr wrap="square" lIns="0" tIns="0" rIns="0" bIns="0" rtlCol="0" anchor="t"/>
-          <a:lstStyle/>
-          <a:p>
-            <a:pPr algn="ctr" indent="0" marL="0">
-              <a:buNone/>
-            </a:pPr>
-            <a:r>
-              <a:rPr lang="en-US" sz="750" i="1" dirty="0">
-                <a:solidFill>
-                  <a:srgbClr val="94A3B8"/>
-                </a:solidFill>
-                <a:latin typeface="Calibri" pitchFamily="34" charset="0"/>
-                <a:ea typeface="Calibri" pitchFamily="34" charset="-122"/>
-                <a:cs typeface="Calibri" pitchFamily="34" charset="-120"/>
-              </a:rPr>
-              <a:t>/s/</a:t>
-            </a:r>
-            <a:endParaRPr lang="en-US" sz="750" dirty="0"/>
-          </a:p>
-        </p:txBody>
-      </p:sp>
-      <p:sp>
-        <p:nvSpPr>
-          <p:cNvPr id="43" name="Shape 41"/>
-          <p:cNvSpPr/>
-          <p:nvPr/>
-        </p:nvSpPr>
-        <p:spPr>
-          <a:xfrm>
-            <a:off x="5759577" y="4169664"/>
-            <a:ext cx="685800" cy="384048"/>
-          </a:xfrm>
-          <a:prstGeom prst="rect">
-            <a:avLst>
-              <a:gd name="adj" fmla="val 9524"/>
-            </a:avLst>
-          </a:prstGeom>
-          <a:solidFill>
-            <a:srgbClr val="FFFFFF"/>
-          </a:solidFill>
-          <a:ln w="12700">
-            <a:solidFill>
-              <a:srgbClr val="DB2777"/>
-            </a:solidFill>
-            <a:prstDash val="solid"/>
-          </a:ln>
-        </p:spPr>
-      </p:sp>
-      <p:sp>
-        <p:nvSpPr>
-          <p:cNvPr id="44" name="Text 42"/>
-          <p:cNvSpPr/>
-          <p:nvPr/>
-        </p:nvSpPr>
-        <p:spPr>
-          <a:xfrm>
-            <a:off x="5759577" y="4169664"/>
-            <a:ext cx="685800" cy="384048"/>
-          </a:xfrm>
-          <a:prstGeom prst="rect">
-            <a:avLst/>
-          </a:prstGeom>
-          <a:noFill/>
-          <a:ln/>
-        </p:spPr>
-        <p:txBody>
-          <a:bodyPr wrap="square" lIns="0" tIns="0" rIns="0" bIns="0" rtlCol="0" anchor="ctr"/>
-          <a:lstStyle/>
-          <a:p>
-            <a:pPr algn="ctr" indent="0" marL="0">
-              <a:buNone/>
-            </a:pPr>
-            <a:r>
-              <a:rPr lang="en-US" sz="900" b="1" dirty="0">
-                <a:solidFill>
-                  <a:srgbClr val="9D174D"/>
-                </a:solidFill>
-                <a:latin typeface="Trebuchet MS" pitchFamily="34" charset="0"/>
-                <a:ea typeface="Trebuchet MS" pitchFamily="34" charset="-122"/>
-                <a:cs typeface="Trebuchet MS" pitchFamily="34" charset="-120"/>
-              </a:rPr>
-              <a:t>e</a:t>
-            </a:r>
-            <a:endParaRPr lang="en-US" sz="900" dirty="0"/>
-          </a:p>
-        </p:txBody>
-      </p:sp>
-      <p:sp>
-        <p:nvSpPr>
-          <p:cNvPr id="45" name="Shape 43"/>
-          <p:cNvSpPr/>
-          <p:nvPr/>
-        </p:nvSpPr>
-        <p:spPr>
-          <a:xfrm>
-            <a:off x="6668262" y="4169664"/>
-            <a:ext cx="685800" cy="384048"/>
-          </a:xfrm>
-          <a:prstGeom prst="rect">
-            <a:avLst>
-              <a:gd name="adj" fmla="val 9524"/>
-            </a:avLst>
-          </a:prstGeom>
-          <a:solidFill>
-            <a:srgbClr val="FFFFFF"/>
-          </a:solidFill>
-          <a:ln w="12700">
-            <a:solidFill>
-              <a:srgbClr val="DB2777"/>
-            </a:solidFill>
-            <a:prstDash val="solid"/>
-          </a:ln>
-        </p:spPr>
-      </p:sp>
-      <p:sp>
-        <p:nvSpPr>
-          <p:cNvPr id="46" name="Text 44"/>
-          <p:cNvSpPr/>
-          <p:nvPr/>
-        </p:nvSpPr>
-        <p:spPr>
-          <a:xfrm>
-            <a:off x="6668262" y="4169664"/>
-            <a:ext cx="685800" cy="384048"/>
-          </a:xfrm>
-          <a:prstGeom prst="rect">
-            <a:avLst/>
-          </a:prstGeom>
-          <a:noFill/>
-          <a:ln/>
-        </p:spPr>
-        <p:txBody>
-          <a:bodyPr wrap="square" lIns="0" tIns="0" rIns="0" bIns="0" rtlCol="0" anchor="ctr"/>
-          <a:lstStyle/>
-          <a:p>
-            <a:pPr algn="ctr" indent="0" marL="0">
-              <a:buNone/>
-            </a:pPr>
-            <a:r>
-              <a:rPr lang="en-US" sz="900" b="1" dirty="0">
-                <a:solidFill>
-                  <a:srgbClr val="9D174D"/>
-                </a:solidFill>
-                <a:latin typeface="Trebuchet MS" pitchFamily="34" charset="0"/>
-                <a:ea typeface="Trebuchet MS" pitchFamily="34" charset="-122"/>
-                <a:cs typeface="Trebuchet MS" pitchFamily="34" charset="-120"/>
-              </a:rPr>
-              <a:t>d</a:t>
-            </a:r>
-            <a:endParaRPr lang="en-US" sz="900" dirty="0"/>
-          </a:p>
-        </p:txBody>
-      </p:sp>
-      <p:sp>
-        <p:nvSpPr>
-          <p:cNvPr id="47" name="Shape 45"/>
-          <p:cNvSpPr/>
-          <p:nvPr/>
-        </p:nvSpPr>
-        <p:spPr>
-          <a:xfrm>
-            <a:off x="7576947" y="4169664"/>
-            <a:ext cx="685800" cy="384048"/>
-          </a:xfrm>
-          <a:prstGeom prst="rect">
-            <a:avLst>
-              <a:gd name="adj" fmla="val 9524"/>
-            </a:avLst>
-          </a:prstGeom>
-          <a:solidFill>
-            <a:srgbClr val="FFFFFF"/>
-          </a:solidFill>
-          <a:ln w="12700">
-            <a:solidFill>
-              <a:srgbClr val="DB2777"/>
-            </a:solidFill>
-            <a:prstDash val="solid"/>
-          </a:ln>
-        </p:spPr>
-      </p:sp>
-      <p:sp>
-        <p:nvSpPr>
-          <p:cNvPr id="48" name="Text 46"/>
-          <p:cNvSpPr/>
-          <p:nvPr/>
-        </p:nvSpPr>
-        <p:spPr>
-          <a:xfrm>
-            <a:off x="7576947" y="4169664"/>
-            <a:ext cx="685800" cy="384048"/>
-          </a:xfrm>
-          <a:prstGeom prst="rect">
-            <a:avLst/>
-          </a:prstGeom>
-          <a:noFill/>
-          <a:ln/>
-        </p:spPr>
-        <p:txBody>
-          <a:bodyPr wrap="square" lIns="0" tIns="0" rIns="0" bIns="0" rtlCol="0" anchor="ctr"/>
-          <a:lstStyle/>
-          <a:p>
-            <a:pPr algn="ctr" indent="0" marL="0">
-              <a:buNone/>
-            </a:pPr>
-            <a:r>
-              <a:rPr lang="en-US" sz="900" b="1" dirty="0">
-                <a:solidFill>
-                  <a:srgbClr val="9D174D"/>
-                </a:solidFill>
-                <a:latin typeface="Trebuchet MS" pitchFamily="34" charset="0"/>
-                <a:ea typeface="Trebuchet MS" pitchFamily="34" charset="-122"/>
-                <a:cs typeface="Trebuchet MS" pitchFamily="34" charset="-120"/>
-              </a:rPr>
-              <a:t>e</a:t>
+              <a:t>de</a:t>
             </a:r>
             <a:endParaRPr lang="en-US" sz="900" dirty="0"/>
           </a:p>
@@ -22525,7 +22191,7 @@
                 <a:ea typeface="Trebuchet MS" pitchFamily="34" charset="-122"/>
                 <a:cs typeface="Trebuchet MS" pitchFamily="34" charset="-120"/>
               </a:rPr>
-              <a:t>secede</a:t>
+              <a:t>precede</a:t>
             </a:r>
             <a:endParaRPr lang="en-US" sz="2800" dirty="0"/>
           </a:p>
@@ -23352,7 +23018,7 @@
                 <a:ea typeface="Trebuchet MS" pitchFamily="34" charset="-122"/>
                 <a:cs typeface="Trebuchet MS" pitchFamily="34" charset="-120"/>
               </a:rPr>
-              <a:t>secede</a:t>
+              <a:t>precede</a:t>
             </a:r>
             <a:endParaRPr lang="en-US" sz="2800" dirty="0"/>
           </a:p>
@@ -23491,7 +23157,7 @@
                 <a:ea typeface="Trebuchet MS" pitchFamily="34" charset="-122"/>
                 <a:cs typeface="Trebuchet MS" pitchFamily="34" charset="-120"/>
               </a:rPr>
-              <a:t>se</a:t>
+              <a:t>pre</a:t>
             </a:r>
             <a:endParaRPr lang="en-US" sz="1300" dirty="0"/>
           </a:p>
@@ -23530,7 +23196,7 @@
                 <a:ea typeface="Calibri" pitchFamily="34" charset="-122"/>
                 <a:cs typeface="Calibri" pitchFamily="34" charset="-120"/>
               </a:rPr>
-              <a:t>apart, away</a:t>
+              <a:t>before</a:t>
             </a:r>
             <a:endParaRPr lang="en-US" sz="850" dirty="0"/>
           </a:p>
@@ -25056,7 +24722,7 @@
                 <a:ea typeface="Trebuchet MS" pitchFamily="34" charset="-122"/>
                 <a:cs typeface="Trebuchet MS" pitchFamily="34" charset="-120"/>
               </a:rPr>
-              <a:t>secede</a:t>
+              <a:t>precede</a:t>
             </a:r>
             <a:endParaRPr lang="en-US" sz="2800" dirty="0"/>
           </a:p>
@@ -25195,7 +24861,7 @@
                 <a:ea typeface="Trebuchet MS" pitchFamily="34" charset="-122"/>
                 <a:cs typeface="Trebuchet MS" pitchFamily="34" charset="-120"/>
               </a:rPr>
-              <a:t>se</a:t>
+              <a:t>pre</a:t>
             </a:r>
             <a:endParaRPr lang="en-US" sz="1300" dirty="0"/>
           </a:p>
@@ -25234,7 +24900,7 @@
                 <a:ea typeface="Calibri" pitchFamily="34" charset="-122"/>
                 <a:cs typeface="Calibri" pitchFamily="34" charset="-120"/>
               </a:rPr>
-              <a:t>apart, away</a:t>
+              <a:t>before</a:t>
             </a:r>
             <a:endParaRPr lang="en-US" sz="850" dirty="0"/>
           </a:p>
@@ -25505,7 +25171,7 @@
                 <a:ea typeface="Trebuchet MS" pitchFamily="34" charset="-122"/>
                 <a:cs typeface="Trebuchet MS" pitchFamily="34" charset="-120"/>
               </a:rPr>
-              <a:t>se</a:t>
+              <a:t>pre</a:t>
             </a:r>
             <a:endParaRPr lang="en-US" sz="1400" dirty="0"/>
           </a:p>
@@ -26173,7 +25839,7 @@
                 <a:ea typeface="Trebuchet MS" pitchFamily="34" charset="-122"/>
                 <a:cs typeface="Trebuchet MS" pitchFamily="34" charset="-120"/>
               </a:rPr>
-              <a:t>secede</a:t>
+              <a:t>precede</a:t>
             </a:r>
             <a:endParaRPr lang="en-US" sz="2800" dirty="0"/>
           </a:p>
@@ -26312,7 +25978,7 @@
                 <a:ea typeface="Trebuchet MS" pitchFamily="34" charset="-122"/>
                 <a:cs typeface="Trebuchet MS" pitchFamily="34" charset="-120"/>
               </a:rPr>
-              <a:t>se</a:t>
+              <a:t>pre</a:t>
             </a:r>
             <a:endParaRPr lang="en-US" sz="1300" dirty="0"/>
           </a:p>
@@ -26351,7 +26017,7 @@
                 <a:ea typeface="Calibri" pitchFamily="34" charset="-122"/>
                 <a:cs typeface="Calibri" pitchFamily="34" charset="-120"/>
               </a:rPr>
-              <a:t>apart, away</a:t>
+              <a:t>before</a:t>
             </a:r>
             <a:endParaRPr lang="en-US" sz="850" dirty="0"/>
           </a:p>
@@ -26622,7 +26288,7 @@
                 <a:ea typeface="Trebuchet MS" pitchFamily="34" charset="-122"/>
                 <a:cs typeface="Trebuchet MS" pitchFamily="34" charset="-120"/>
               </a:rPr>
-              <a:t>se</a:t>
+              <a:t>pre</a:t>
             </a:r>
             <a:endParaRPr lang="en-US" sz="1400" dirty="0"/>
           </a:p>
@@ -26886,7 +26552,7 @@
                 <a:ea typeface="Trebuchet MS" pitchFamily="34" charset="-122"/>
                 <a:cs typeface="Trebuchet MS" pitchFamily="34" charset="-120"/>
               </a:rPr>
-              <a:t>s</a:t>
+              <a:t>p</a:t>
             </a:r>
             <a:endParaRPr lang="en-US" sz="900" dirty="0"/>
           </a:p>
@@ -26952,7 +26618,7 @@
                 <a:ea typeface="Trebuchet MS" pitchFamily="34" charset="-122"/>
                 <a:cs typeface="Trebuchet MS" pitchFamily="34" charset="-120"/>
               </a:rPr>
-              <a:t>e</a:t>
+              <a:t>r</a:t>
             </a:r>
             <a:endParaRPr lang="en-US" sz="900" dirty="0"/>
           </a:p>
@@ -27018,6 +26684,72 @@
                 <a:ea typeface="Trebuchet MS" pitchFamily="34" charset="-122"/>
                 <a:cs typeface="Trebuchet MS" pitchFamily="34" charset="-120"/>
               </a:rPr>
+              <a:t>e</a:t>
+            </a:r>
+            <a:endParaRPr lang="en-US" sz="900" dirty="0"/>
+          </a:p>
+        </p:txBody>
+      </p:sp>
+      <p:sp>
+        <p:nvSpPr>
+          <p:cNvPr id="39" name="Shape 37"/>
+          <p:cNvSpPr/>
+          <p:nvPr/>
+        </p:nvSpPr>
+        <p:spPr>
+          <a:xfrm>
+            <a:off x="5370141" y="4169664"/>
+            <a:ext cx="685800" cy="384048"/>
+          </a:xfrm>
+          <a:prstGeom prst="rect">
+            <a:avLst>
+              <a:gd name="adj" fmla="val 9524"/>
+            </a:avLst>
+          </a:prstGeom>
+          <a:solidFill>
+            <a:srgbClr val="FFFFFF"/>
+          </a:solidFill>
+          <a:ln w="12700">
+            <a:solidFill>
+              <a:srgbClr val="DB2777"/>
+            </a:solidFill>
+            <a:prstDash val="solid"/>
+          </a:ln>
+        </p:spPr>
+      </p:sp>
+      <p:sp>
+        <p:nvSpPr>
+          <p:cNvPr id="40" name="Text 38"/>
+          <p:cNvSpPr/>
+          <p:nvPr/>
+        </p:nvSpPr>
+        <p:spPr>
+          <a:xfrm>
+            <a:off x="5370141" y="4169664"/>
+            <a:ext cx="685800" cy="384048"/>
+          </a:xfrm>
+          <a:prstGeom prst="rect">
+            <a:avLst/>
+          </a:prstGeom>
+          <a:noFill/>
+          <a:ln/>
+        </p:spPr>
+        <p:txBody>
+          <a:bodyPr wrap="square" lIns="0" tIns="0" rIns="0" bIns="0" rtlCol="0" anchor="ctr"/>
+          <a:lstStyle/>
+          <a:p>
+            <a:pPr algn="ctr" indent="0" marL="0">
+              <a:buNone/>
+            </a:pPr>
+            <a:r>
+              <a:rPr lang="en-US" sz="900" b="1" dirty="0">
+                <a:solidFill>
+                  <a:srgbClr val="9D174D"/>
+                </a:solidFill>
+                <a:latin typeface="Trebuchet MS" pitchFamily="34" charset="0"/>
+                <a:ea typeface="Trebuchet MS" pitchFamily="34" charset="-122"/>
+                <a:cs typeface="Trebuchet MS" pitchFamily="34" charset="-120"/>
+              </a:rPr>
               <a:t>c</a:t>
             </a:r>
             <a:endParaRPr lang="en-US" sz="900" dirty="0"/>
@@ -27026,13 +26758,13 @@
       </p:sp>
       <p:sp>
         <p:nvSpPr>
-          <p:cNvPr id="39" name="Text 37"/>
-          <p:cNvSpPr/>
-          <p:nvPr/>
-        </p:nvSpPr>
-        <p:spPr>
-          <a:xfrm>
-            <a:off x="4331643" y="4572000"/>
+          <p:cNvPr id="41" name="Text 39"/>
+          <p:cNvSpPr/>
+          <p:nvPr/>
+        </p:nvSpPr>
+        <p:spPr>
+          <a:xfrm>
+            <a:off x="5370141" y="4572000"/>
             <a:ext cx="685800" cy="219456"/>
           </a:xfrm>
           <a:prstGeom prst="rect">
@@ -27065,13 +26797,13 @@
       </p:sp>
       <p:sp>
         <p:nvSpPr>
-          <p:cNvPr id="40" name="Shape 38"/>
-          <p:cNvSpPr/>
-          <p:nvPr/>
-        </p:nvSpPr>
-        <p:spPr>
-          <a:xfrm>
-            <a:off x="5370141" y="4169664"/>
+          <p:cNvPr id="42" name="Shape 40"/>
+          <p:cNvSpPr/>
+          <p:nvPr/>
+        </p:nvSpPr>
+        <p:spPr>
+          <a:xfrm>
+            <a:off x="6408638" y="4169664"/>
             <a:ext cx="685800" cy="384048"/>
           </a:xfrm>
           <a:prstGeom prst="rect">
@@ -27092,13 +26824,13 @@
       </p:sp>
       <p:sp>
         <p:nvSpPr>
-          <p:cNvPr id="41" name="Text 39"/>
-          <p:cNvSpPr/>
-          <p:nvPr/>
-        </p:nvSpPr>
-        <p:spPr>
-          <a:xfrm>
-            <a:off x="5370141" y="4169664"/>
+          <p:cNvPr id="43" name="Text 41"/>
+          <p:cNvSpPr/>
+          <p:nvPr/>
+        </p:nvSpPr>
+        <p:spPr>
+          <a:xfrm>
+            <a:off x="6408638" y="4169664"/>
             <a:ext cx="685800" cy="384048"/>
           </a:xfrm>
           <a:prstGeom prst="rect">
@@ -27131,13 +26863,13 @@
       </p:sp>
       <p:sp>
         <p:nvSpPr>
-          <p:cNvPr id="42" name="Shape 40"/>
-          <p:cNvSpPr/>
-          <p:nvPr/>
-        </p:nvSpPr>
-        <p:spPr>
-          <a:xfrm>
-            <a:off x="6408638" y="4169664"/>
+          <p:cNvPr id="44" name="Shape 42"/>
+          <p:cNvSpPr/>
+          <p:nvPr/>
+        </p:nvSpPr>
+        <p:spPr>
+          <a:xfrm>
+            <a:off x="7447135" y="4169664"/>
             <a:ext cx="685800" cy="384048"/>
           </a:xfrm>
           <a:prstGeom prst="rect">
@@ -27158,13 +26890,13 @@
       </p:sp>
       <p:sp>
         <p:nvSpPr>
-          <p:cNvPr id="43" name="Text 41"/>
-          <p:cNvSpPr/>
-          <p:nvPr/>
-        </p:nvSpPr>
-        <p:spPr>
-          <a:xfrm>
-            <a:off x="6408638" y="4169664"/>
+          <p:cNvPr id="45" name="Text 43"/>
+          <p:cNvSpPr/>
+          <p:nvPr/>
+        </p:nvSpPr>
+        <p:spPr>
+          <a:xfrm>
+            <a:off x="7447135" y="4169664"/>
             <a:ext cx="685800" cy="384048"/>
           </a:xfrm>
           <a:prstGeom prst="rect">
@@ -27189,73 +26921,7 @@
                 <a:ea typeface="Trebuchet MS" pitchFamily="34" charset="-122"/>
                 <a:cs typeface="Trebuchet MS" pitchFamily="34" charset="-120"/>
               </a:rPr>
-              <a:t>d</a:t>
-            </a:r>
-            <a:endParaRPr lang="en-US" sz="900" dirty="0"/>
-          </a:p>
-        </p:txBody>
-      </p:sp>
-      <p:sp>
-        <p:nvSpPr>
-          <p:cNvPr id="44" name="Shape 42"/>
-          <p:cNvSpPr/>
-          <p:nvPr/>
-        </p:nvSpPr>
-        <p:spPr>
-          <a:xfrm>
-            <a:off x="7447135" y="4169664"/>
-            <a:ext cx="685800" cy="384048"/>
-          </a:xfrm>
-          <a:prstGeom prst="rect">
-            <a:avLst>
-              <a:gd name="adj" fmla="val 9524"/>
-            </a:avLst>
-          </a:prstGeom>
-          <a:solidFill>
-            <a:srgbClr val="FFFFFF"/>
-          </a:solidFill>
-          <a:ln w="12700">
-            <a:solidFill>
-              <a:srgbClr val="DB2777"/>
-            </a:solidFill>
-            <a:prstDash val="solid"/>
-          </a:ln>
-        </p:spPr>
-      </p:sp>
-      <p:sp>
-        <p:nvSpPr>
-          <p:cNvPr id="45" name="Text 43"/>
-          <p:cNvSpPr/>
-          <p:nvPr/>
-        </p:nvSpPr>
-        <p:spPr>
-          <a:xfrm>
-            <a:off x="7447135" y="4169664"/>
-            <a:ext cx="685800" cy="384048"/>
-          </a:xfrm>
-          <a:prstGeom prst="rect">
-            <a:avLst/>
-          </a:prstGeom>
-          <a:noFill/>
-          <a:ln/>
-        </p:spPr>
-        <p:txBody>
-          <a:bodyPr wrap="square" lIns="0" tIns="0" rIns="0" bIns="0" rtlCol="0" anchor="ctr"/>
-          <a:lstStyle/>
-          <a:p>
-            <a:pPr algn="ctr" indent="0" marL="0">
-              <a:buNone/>
-            </a:pPr>
-            <a:r>
-              <a:rPr lang="en-US" sz="900" b="1" dirty="0">
-                <a:solidFill>
-                  <a:srgbClr val="9D174D"/>
-                </a:solidFill>
-                <a:latin typeface="Trebuchet MS" pitchFamily="34" charset="0"/>
-                <a:ea typeface="Trebuchet MS" pitchFamily="34" charset="-122"/>
-                <a:cs typeface="Trebuchet MS" pitchFamily="34" charset="-120"/>
-              </a:rPr>
-              <a:t>e</a:t>
+              <a:t>de</a:t>
             </a:r>
             <a:endParaRPr lang="en-US" sz="900" dirty="0"/>
           </a:p>
@@ -27686,7 +27352,7 @@
                 <a:ea typeface="Trebuchet MS" pitchFamily="34" charset="-122"/>
                 <a:cs typeface="Trebuchet MS" pitchFamily="34" charset="-120"/>
               </a:rPr>
-              <a:t>precede</a:t>
+              <a:t>preceded</a:t>
             </a:r>
             <a:endParaRPr lang="en-US" sz="2800" dirty="0"/>
           </a:p>
@@ -28513,7 +28179,7 @@
                 <a:ea typeface="Trebuchet MS" pitchFamily="34" charset="-122"/>
                 <a:cs typeface="Trebuchet MS" pitchFamily="34" charset="-120"/>
               </a:rPr>
-              <a:t>precede</a:t>
+              <a:t>preceded</a:t>
             </a:r>
             <a:endParaRPr lang="en-US" sz="2800" dirty="0"/>
           </a:p>
@@ -28593,7 +28259,7 @@
         </p:nvSpPr>
         <p:spPr>
           <a:xfrm>
-            <a:off x="2938272" y="2258568"/>
+            <a:off x="2221992" y="2258568"/>
             <a:ext cx="1828800" cy="292608"/>
           </a:xfrm>
           <a:prstGeom prst="rect">
@@ -28627,7 +28293,7 @@
         </p:nvSpPr>
         <p:spPr>
           <a:xfrm>
-            <a:off x="2938272" y="2258568"/>
+            <a:off x="2221992" y="2258568"/>
             <a:ext cx="1828800" cy="292608"/>
           </a:xfrm>
           <a:prstGeom prst="rect">
@@ -28666,7 +28332,7 @@
         </p:nvSpPr>
         <p:spPr>
           <a:xfrm>
-            <a:off x="2938272" y="2569464"/>
+            <a:off x="2221992" y="2569464"/>
             <a:ext cx="1828800" cy="201168"/>
           </a:xfrm>
           <a:prstGeom prst="rect">
@@ -28705,7 +28371,7 @@
         </p:nvSpPr>
         <p:spPr>
           <a:xfrm>
-            <a:off x="5803392" y="2258568"/>
+            <a:off x="4370832" y="2258568"/>
             <a:ext cx="1828800" cy="292608"/>
           </a:xfrm>
           <a:prstGeom prst="rect">
@@ -28739,7 +28405,7 @@
         </p:nvSpPr>
         <p:spPr>
           <a:xfrm>
-            <a:off x="5803392" y="2258568"/>
+            <a:off x="4370832" y="2258568"/>
             <a:ext cx="1828800" cy="292608"/>
           </a:xfrm>
           <a:prstGeom prst="rect">
@@ -28778,7 +28444,7 @@
         </p:nvSpPr>
         <p:spPr>
           <a:xfrm>
-            <a:off x="5803392" y="2569464"/>
+            <a:off x="4370832" y="2569464"/>
             <a:ext cx="1828800" cy="201168"/>
           </a:xfrm>
           <a:prstGeom prst="rect">
@@ -28817,6 +28483,157 @@
         </p:nvSpPr>
         <p:spPr>
           <a:xfrm>
+            <a:off x="6519672" y="2258568"/>
+            <a:ext cx="1828800" cy="292608"/>
+          </a:xfrm>
+          <a:prstGeom prst="rect">
+            <a:avLst>
+              <a:gd name="adj" fmla="val 25000"/>
+            </a:avLst>
+          </a:prstGeom>
+          <a:solidFill>
+            <a:srgbClr val="FCE7F3"/>
+          </a:solidFill>
+          <a:ln w="19050">
+            <a:solidFill>
+              <a:srgbClr val="DB2777"/>
+            </a:solidFill>
+            <a:prstDash val="solid"/>
+          </a:ln>
+          <a:effectLst>
+            <a:outerShdw sx="100000" sy="100000" kx="0" ky="0" algn="bl" rotWithShape="0" blurRad="101600" dist="38100" dir="8100000">
+              <a:srgbClr val="000000">
+                <a:alpha val="12000"/>
+              </a:srgbClr>
+            </a:outerShdw>
+          </a:effectLst>
+        </p:spPr>
+      </p:sp>
+      <p:sp>
+        <p:nvSpPr>
+          <p:cNvPr id="23" name="Text 21"/>
+          <p:cNvSpPr/>
+          <p:nvPr/>
+        </p:nvSpPr>
+        <p:spPr>
+          <a:xfrm>
+            <a:off x="6519672" y="2258568"/>
+            <a:ext cx="1828800" cy="292608"/>
+          </a:xfrm>
+          <a:prstGeom prst="rect">
+            <a:avLst/>
+          </a:prstGeom>
+          <a:noFill/>
+          <a:ln/>
+        </p:spPr>
+        <p:txBody>
+          <a:bodyPr wrap="square" lIns="0" tIns="0" rIns="0" bIns="0" rtlCol="0" anchor="ctr"/>
+          <a:lstStyle/>
+          <a:p>
+            <a:pPr algn="ctr" indent="0" marL="0">
+              <a:buNone/>
+            </a:pPr>
+            <a:r>
+              <a:rPr lang="en-US" sz="1300" b="1" dirty="0">
+                <a:solidFill>
+                  <a:srgbClr val="9D174D"/>
+                </a:solidFill>
+                <a:latin typeface="Trebuchet MS" pitchFamily="34" charset="0"/>
+                <a:ea typeface="Trebuchet MS" pitchFamily="34" charset="-122"/>
+                <a:cs typeface="Trebuchet MS" pitchFamily="34" charset="-120"/>
+              </a:rPr>
+              <a:t>d</a:t>
+            </a:r>
+            <a:endParaRPr lang="en-US" sz="1300" dirty="0"/>
+          </a:p>
+        </p:txBody>
+      </p:sp>
+      <p:sp>
+        <p:nvSpPr>
+          <p:cNvPr id="24" name="Text 22"/>
+          <p:cNvSpPr/>
+          <p:nvPr/>
+        </p:nvSpPr>
+        <p:spPr>
+          <a:xfrm>
+            <a:off x="6519672" y="2569464"/>
+            <a:ext cx="1828800" cy="201168"/>
+          </a:xfrm>
+          <a:prstGeom prst="rect">
+            <a:avLst/>
+          </a:prstGeom>
+          <a:noFill/>
+          <a:ln/>
+        </p:spPr>
+        <p:txBody>
+          <a:bodyPr wrap="square" lIns="0" tIns="0" rIns="0" bIns="0" rtlCol="0" anchor="t"/>
+          <a:lstStyle/>
+          <a:p>
+            <a:pPr algn="ctr" indent="0" marL="0">
+              <a:buNone/>
+            </a:pPr>
+            <a:r>
+              <a:rPr lang="en-US" sz="850" dirty="0">
+                <a:solidFill>
+                  <a:srgbClr val="475569"/>
+                </a:solidFill>
+                <a:latin typeface="Calibri" pitchFamily="34" charset="0"/>
+                <a:ea typeface="Calibri" pitchFamily="34" charset="-122"/>
+                <a:cs typeface="Calibri" pitchFamily="34" charset="-120"/>
+              </a:rPr>
+              <a:t>past tense</a:t>
+            </a:r>
+            <a:endParaRPr lang="en-US" sz="850" dirty="0"/>
+          </a:p>
+        </p:txBody>
+      </p:sp>
+      <p:sp>
+        <p:nvSpPr>
+          <p:cNvPr id="25" name="Text 23"/>
+          <p:cNvSpPr/>
+          <p:nvPr/>
+        </p:nvSpPr>
+        <p:spPr>
+          <a:xfrm>
+            <a:off x="6519672" y="2752344"/>
+            <a:ext cx="1828800" cy="182880"/>
+          </a:xfrm>
+          <a:prstGeom prst="rect">
+            <a:avLst/>
+          </a:prstGeom>
+          <a:noFill/>
+          <a:ln/>
+        </p:spPr>
+        <p:txBody>
+          <a:bodyPr wrap="square" lIns="0" tIns="0" rIns="0" bIns="0" rtlCol="0" anchor="t"/>
+          <a:lstStyle/>
+          <a:p>
+            <a:pPr algn="ctr" indent="0" marL="0">
+              <a:buNone/>
+            </a:pPr>
+            <a:r>
+              <a:rPr lang="en-US" sz="700" i="1" dirty="0">
+                <a:solidFill>
+                  <a:srgbClr val="94A3B8"/>
+                </a:solidFill>
+                <a:latin typeface="Calibri" pitchFamily="34" charset="0"/>
+                <a:ea typeface="Calibri" pitchFamily="34" charset="-122"/>
+                <a:cs typeface="Calibri" pitchFamily="34" charset="-120"/>
+              </a:rPr>
+              <a:t>'e' kept before 'd' suffix</a:t>
+            </a:r>
+            <a:endParaRPr lang="en-US" sz="700" dirty="0"/>
+          </a:p>
+        </p:txBody>
+      </p:sp>
+      <p:sp>
+        <p:nvSpPr>
+          <p:cNvPr id="26" name="Shape 24"/>
+          <p:cNvSpPr/>
+          <p:nvPr/>
+        </p:nvSpPr>
+        <p:spPr>
+          <a:xfrm>
             <a:off x="365760" y="3273552"/>
             <a:ext cx="1371600" cy="658368"/>
           </a:xfrm>
@@ -28838,7 +28655,7 @@
       </p:sp>
       <p:sp>
         <p:nvSpPr>
-          <p:cNvPr id="23" name="Text 21"/>
+          <p:cNvPr id="27" name="Text 25"/>
           <p:cNvSpPr/>
           <p:nvPr/>
         </p:nvSpPr>
@@ -28877,7 +28694,7 @@
       </p:sp>
       <p:sp>
         <p:nvSpPr>
-          <p:cNvPr id="24" name="Shape 22"/>
+          <p:cNvPr id="28" name="Shape 26"/>
           <p:cNvSpPr/>
           <p:nvPr/>
         </p:nvSpPr>
@@ -28904,7 +28721,7 @@
       </p:sp>
       <p:sp>
         <p:nvSpPr>
-          <p:cNvPr id="25" name="Text 23"/>
+          <p:cNvPr id="29" name="Text 27"/>
           <p:cNvSpPr/>
           <p:nvPr/>
         </p:nvSpPr>
@@ -28943,7 +28760,7 @@
       </p:sp>
       <p:sp>
         <p:nvSpPr>
-          <p:cNvPr id="26" name="Shape 24"/>
+          <p:cNvPr id="30" name="Shape 28"/>
           <p:cNvSpPr/>
           <p:nvPr/>
         </p:nvSpPr>
@@ -28970,7 +28787,7 @@
       </p:sp>
       <p:sp>
         <p:nvSpPr>
-          <p:cNvPr id="27" name="Text 25"/>
+          <p:cNvPr id="31" name="Text 29"/>
           <p:cNvSpPr/>
           <p:nvPr/>
         </p:nvSpPr>
@@ -29009,7 +28826,7 @@
       </p:sp>
       <p:sp>
         <p:nvSpPr>
-          <p:cNvPr id="28" name="Shape 26"/>
+          <p:cNvPr id="32" name="Shape 30"/>
           <p:cNvSpPr/>
           <p:nvPr/>
         </p:nvSpPr>
@@ -29036,7 +28853,7 @@
       </p:sp>
       <p:sp>
         <p:nvSpPr>
-          <p:cNvPr id="29" name="Text 27"/>
+          <p:cNvPr id="33" name="Text 31"/>
           <p:cNvSpPr/>
           <p:nvPr/>
         </p:nvSpPr>
@@ -29498,7 +29315,7 @@
                 <a:ea typeface="Trebuchet MS" pitchFamily="34" charset="-122"/>
                 <a:cs typeface="Trebuchet MS" pitchFamily="34" charset="-120"/>
               </a:rPr>
-              <a:t>precede</a:t>
+              <a:t>preceded</a:t>
             </a:r>
             <a:endParaRPr lang="en-US" sz="2800" dirty="0"/>
           </a:p>
@@ -29578,7 +29395,7 @@
         </p:nvSpPr>
         <p:spPr>
           <a:xfrm>
-            <a:off x="2938272" y="2258568"/>
+            <a:off x="2221992" y="2258568"/>
             <a:ext cx="1828800" cy="292608"/>
           </a:xfrm>
           <a:prstGeom prst="rect">
@@ -29612,7 +29429,7 @@
         </p:nvSpPr>
         <p:spPr>
           <a:xfrm>
-            <a:off x="2938272" y="2258568"/>
+            <a:off x="2221992" y="2258568"/>
             <a:ext cx="1828800" cy="292608"/>
           </a:xfrm>
           <a:prstGeom prst="rect">
@@ -29651,7 +29468,7 @@
         </p:nvSpPr>
         <p:spPr>
           <a:xfrm>
-            <a:off x="2938272" y="2569464"/>
+            <a:off x="2221992" y="2569464"/>
             <a:ext cx="1828800" cy="201168"/>
           </a:xfrm>
           <a:prstGeom prst="rect">
@@ -29690,7 +29507,7 @@
         </p:nvSpPr>
         <p:spPr>
           <a:xfrm>
-            <a:off x="5803392" y="2258568"/>
+            <a:off x="4370832" y="2258568"/>
             <a:ext cx="1828800" cy="292608"/>
           </a:xfrm>
           <a:prstGeom prst="rect">
@@ -29724,7 +29541,7 @@
         </p:nvSpPr>
         <p:spPr>
           <a:xfrm>
-            <a:off x="5803392" y="2258568"/>
+            <a:off x="4370832" y="2258568"/>
             <a:ext cx="1828800" cy="292608"/>
           </a:xfrm>
           <a:prstGeom prst="rect">
@@ -29763,7 +29580,7 @@
         </p:nvSpPr>
         <p:spPr>
           <a:xfrm>
-            <a:off x="5803392" y="2569464"/>
+            <a:off x="4370832" y="2569464"/>
             <a:ext cx="1828800" cy="201168"/>
           </a:xfrm>
           <a:prstGeom prst="rect">
@@ -29802,6 +29619,157 @@
         </p:nvSpPr>
         <p:spPr>
           <a:xfrm>
+            <a:off x="6519672" y="2258568"/>
+            <a:ext cx="1828800" cy="292608"/>
+          </a:xfrm>
+          <a:prstGeom prst="rect">
+            <a:avLst>
+              <a:gd name="adj" fmla="val 25000"/>
+            </a:avLst>
+          </a:prstGeom>
+          <a:solidFill>
+            <a:srgbClr val="FCE7F3"/>
+          </a:solidFill>
+          <a:ln w="19050">
+            <a:solidFill>
+              <a:srgbClr val="DB2777"/>
+            </a:solidFill>
+            <a:prstDash val="solid"/>
+          </a:ln>
+          <a:effectLst>
+            <a:outerShdw sx="100000" sy="100000" kx="0" ky="0" algn="bl" rotWithShape="0" blurRad="101600" dist="38100" dir="8100000">
+              <a:srgbClr val="000000">
+                <a:alpha val="12000"/>
+              </a:srgbClr>
+            </a:outerShdw>
+          </a:effectLst>
+        </p:spPr>
+      </p:sp>
+      <p:sp>
+        <p:nvSpPr>
+          <p:cNvPr id="23" name="Text 21"/>
+          <p:cNvSpPr/>
+          <p:nvPr/>
+        </p:nvSpPr>
+        <p:spPr>
+          <a:xfrm>
+            <a:off x="6519672" y="2258568"/>
+            <a:ext cx="1828800" cy="292608"/>
+          </a:xfrm>
+          <a:prstGeom prst="rect">
+            <a:avLst/>
+          </a:prstGeom>
+          <a:noFill/>
+          <a:ln/>
+        </p:spPr>
+        <p:txBody>
+          <a:bodyPr wrap="square" lIns="0" tIns="0" rIns="0" bIns="0" rtlCol="0" anchor="ctr"/>
+          <a:lstStyle/>
+          <a:p>
+            <a:pPr algn="ctr" indent="0" marL="0">
+              <a:buNone/>
+            </a:pPr>
+            <a:r>
+              <a:rPr lang="en-US" sz="1300" b="1" dirty="0">
+                <a:solidFill>
+                  <a:srgbClr val="9D174D"/>
+                </a:solidFill>
+                <a:latin typeface="Trebuchet MS" pitchFamily="34" charset="0"/>
+                <a:ea typeface="Trebuchet MS" pitchFamily="34" charset="-122"/>
+                <a:cs typeface="Trebuchet MS" pitchFamily="34" charset="-120"/>
+              </a:rPr>
+              <a:t>d</a:t>
+            </a:r>
+            <a:endParaRPr lang="en-US" sz="1300" dirty="0"/>
+          </a:p>
+        </p:txBody>
+      </p:sp>
+      <p:sp>
+        <p:nvSpPr>
+          <p:cNvPr id="24" name="Text 22"/>
+          <p:cNvSpPr/>
+          <p:nvPr/>
+        </p:nvSpPr>
+        <p:spPr>
+          <a:xfrm>
+            <a:off x="6519672" y="2569464"/>
+            <a:ext cx="1828800" cy="201168"/>
+          </a:xfrm>
+          <a:prstGeom prst="rect">
+            <a:avLst/>
+          </a:prstGeom>
+          <a:noFill/>
+          <a:ln/>
+        </p:spPr>
+        <p:txBody>
+          <a:bodyPr wrap="square" lIns="0" tIns="0" rIns="0" bIns="0" rtlCol="0" anchor="t"/>
+          <a:lstStyle/>
+          <a:p>
+            <a:pPr algn="ctr" indent="0" marL="0">
+              <a:buNone/>
+            </a:pPr>
+            <a:r>
+              <a:rPr lang="en-US" sz="850" dirty="0">
+                <a:solidFill>
+                  <a:srgbClr val="475569"/>
+                </a:solidFill>
+                <a:latin typeface="Calibri" pitchFamily="34" charset="0"/>
+                <a:ea typeface="Calibri" pitchFamily="34" charset="-122"/>
+                <a:cs typeface="Calibri" pitchFamily="34" charset="-120"/>
+              </a:rPr>
+              <a:t>past tense</a:t>
+            </a:r>
+            <a:endParaRPr lang="en-US" sz="850" dirty="0"/>
+          </a:p>
+        </p:txBody>
+      </p:sp>
+      <p:sp>
+        <p:nvSpPr>
+          <p:cNvPr id="25" name="Text 23"/>
+          <p:cNvSpPr/>
+          <p:nvPr/>
+        </p:nvSpPr>
+        <p:spPr>
+          <a:xfrm>
+            <a:off x="6519672" y="2752344"/>
+            <a:ext cx="1828800" cy="182880"/>
+          </a:xfrm>
+          <a:prstGeom prst="rect">
+            <a:avLst/>
+          </a:prstGeom>
+          <a:noFill/>
+          <a:ln/>
+        </p:spPr>
+        <p:txBody>
+          <a:bodyPr wrap="square" lIns="0" tIns="0" rIns="0" bIns="0" rtlCol="0" anchor="t"/>
+          <a:lstStyle/>
+          <a:p>
+            <a:pPr algn="ctr" indent="0" marL="0">
+              <a:buNone/>
+            </a:pPr>
+            <a:r>
+              <a:rPr lang="en-US" sz="700" i="1" dirty="0">
+                <a:solidFill>
+                  <a:srgbClr val="94A3B8"/>
+                </a:solidFill>
+                <a:latin typeface="Calibri" pitchFamily="34" charset="0"/>
+                <a:ea typeface="Calibri" pitchFamily="34" charset="-122"/>
+                <a:cs typeface="Calibri" pitchFamily="34" charset="-120"/>
+              </a:rPr>
+              <a:t>'e' kept before 'd' suffix</a:t>
+            </a:r>
+            <a:endParaRPr lang="en-US" sz="700" dirty="0"/>
+          </a:p>
+        </p:txBody>
+      </p:sp>
+      <p:sp>
+        <p:nvSpPr>
+          <p:cNvPr id="26" name="Shape 24"/>
+          <p:cNvSpPr/>
+          <p:nvPr/>
+        </p:nvSpPr>
+        <p:spPr>
+          <a:xfrm>
             <a:off x="365760" y="3273552"/>
             <a:ext cx="1371600" cy="658368"/>
           </a:xfrm>
@@ -29823,7 +29791,7 @@
       </p:sp>
       <p:sp>
         <p:nvSpPr>
-          <p:cNvPr id="23" name="Text 21"/>
+          <p:cNvPr id="27" name="Text 25"/>
           <p:cNvSpPr/>
           <p:nvPr/>
         </p:nvSpPr>
@@ -29862,7 +29830,7 @@
       </p:sp>
       <p:sp>
         <p:nvSpPr>
-          <p:cNvPr id="24" name="Shape 22"/>
+          <p:cNvPr id="28" name="Shape 26"/>
           <p:cNvSpPr/>
           <p:nvPr/>
         </p:nvSpPr>
@@ -29889,13 +29857,13 @@
       </p:sp>
       <p:sp>
         <p:nvSpPr>
-          <p:cNvPr id="25" name="Shape 23"/>
-          <p:cNvSpPr/>
-          <p:nvPr/>
-        </p:nvSpPr>
-        <p:spPr>
-          <a:xfrm>
-            <a:off x="2999232" y="3364992"/>
+          <p:cNvPr id="29" name="Shape 27"/>
+          <p:cNvSpPr/>
+          <p:nvPr/>
+        </p:nvSpPr>
+        <p:spPr>
+          <a:xfrm>
+            <a:off x="2313432" y="3364992"/>
             <a:ext cx="1645920" cy="475488"/>
           </a:xfrm>
           <a:prstGeom prst="rect">
@@ -29916,13 +29884,13 @@
       </p:sp>
       <p:sp>
         <p:nvSpPr>
-          <p:cNvPr id="26" name="Text 24"/>
-          <p:cNvSpPr/>
-          <p:nvPr/>
-        </p:nvSpPr>
-        <p:spPr>
-          <a:xfrm>
-            <a:off x="2999232" y="3364992"/>
+          <p:cNvPr id="30" name="Text 28"/>
+          <p:cNvSpPr/>
+          <p:nvPr/>
+        </p:nvSpPr>
+        <p:spPr>
+          <a:xfrm>
+            <a:off x="2313432" y="3364992"/>
             <a:ext cx="1645920" cy="475488"/>
           </a:xfrm>
           <a:prstGeom prst="rect">
@@ -29955,14 +29923,14 @@
       </p:sp>
       <p:sp>
         <p:nvSpPr>
-          <p:cNvPr id="27" name="Text 25"/>
-          <p:cNvSpPr/>
-          <p:nvPr/>
-        </p:nvSpPr>
-        <p:spPr>
-          <a:xfrm>
-            <a:off x="4645152" y="3364992"/>
-            <a:ext cx="1097280" cy="475488"/>
+          <p:cNvPr id="31" name="Text 29"/>
+          <p:cNvSpPr/>
+          <p:nvPr/>
+        </p:nvSpPr>
+        <p:spPr>
+          <a:xfrm>
+            <a:off x="3959352" y="3364992"/>
+            <a:ext cx="411480" cy="475488"/>
           </a:xfrm>
           <a:prstGeom prst="rect">
             <a:avLst/>
@@ -29994,13 +29962,13 @@
       </p:sp>
       <p:sp>
         <p:nvSpPr>
-          <p:cNvPr id="28" name="Shape 26"/>
-          <p:cNvSpPr/>
-          <p:nvPr/>
-        </p:nvSpPr>
-        <p:spPr>
-          <a:xfrm>
-            <a:off x="5742432" y="3364992"/>
+          <p:cNvPr id="32" name="Shape 30"/>
+          <p:cNvSpPr/>
+          <p:nvPr/>
+        </p:nvSpPr>
+        <p:spPr>
+          <a:xfrm>
+            <a:off x="4370832" y="3364992"/>
             <a:ext cx="1645920" cy="475488"/>
           </a:xfrm>
           <a:prstGeom prst="rect">
@@ -30021,13 +29989,13 @@
       </p:sp>
       <p:sp>
         <p:nvSpPr>
-          <p:cNvPr id="29" name="Text 27"/>
-          <p:cNvSpPr/>
-          <p:nvPr/>
-        </p:nvSpPr>
-        <p:spPr>
-          <a:xfrm>
-            <a:off x="5742432" y="3364992"/>
+          <p:cNvPr id="33" name="Text 31"/>
+          <p:cNvSpPr/>
+          <p:nvPr/>
+        </p:nvSpPr>
+        <p:spPr>
+          <a:xfrm>
+            <a:off x="4370832" y="3364992"/>
             <a:ext cx="1645920" cy="475488"/>
           </a:xfrm>
           <a:prstGeom prst="rect">
@@ -30052,7 +30020,7 @@
                 <a:ea typeface="Trebuchet MS" pitchFamily="34" charset="-122"/>
                 <a:cs typeface="Trebuchet MS" pitchFamily="34" charset="-120"/>
               </a:rPr>
-              <a:t>cede</a:t>
+              <a:t>ce</a:t>
             </a:r>
             <a:endParaRPr lang="en-US" sz="1400" dirty="0"/>
           </a:p>
@@ -30060,7 +30028,112 @@
       </p:sp>
       <p:sp>
         <p:nvSpPr>
-          <p:cNvPr id="30" name="Shape 28"/>
+          <p:cNvPr id="34" name="Text 32"/>
+          <p:cNvSpPr/>
+          <p:nvPr/>
+        </p:nvSpPr>
+        <p:spPr>
+          <a:xfrm>
+            <a:off x="6016752" y="3364992"/>
+            <a:ext cx="411480" cy="475488"/>
+          </a:xfrm>
+          <a:prstGeom prst="rect">
+            <a:avLst/>
+          </a:prstGeom>
+          <a:noFill/>
+          <a:ln/>
+        </p:spPr>
+        <p:txBody>
+          <a:bodyPr wrap="square" lIns="0" tIns="0" rIns="0" bIns="0" rtlCol="0" anchor="ctr"/>
+          <a:lstStyle/>
+          <a:p>
+            <a:pPr algn="ctr" indent="0" marL="0">
+              <a:buNone/>
+            </a:pPr>
+            <a:r>
+              <a:rPr lang="en-US" sz="1600" b="1" dirty="0">
+                <a:solidFill>
+                  <a:srgbClr val="0D9488"/>
+                </a:solidFill>
+                <a:latin typeface="Trebuchet MS" pitchFamily="34" charset="0"/>
+                <a:ea typeface="Trebuchet MS" pitchFamily="34" charset="-122"/>
+                <a:cs typeface="Trebuchet MS" pitchFamily="34" charset="-120"/>
+              </a:rPr>
+              <a:t>·</a:t>
+            </a:r>
+            <a:endParaRPr lang="en-US" sz="1600" dirty="0"/>
+          </a:p>
+        </p:txBody>
+      </p:sp>
+      <p:sp>
+        <p:nvSpPr>
+          <p:cNvPr id="35" name="Shape 33"/>
+          <p:cNvSpPr/>
+          <p:nvPr/>
+        </p:nvSpPr>
+        <p:spPr>
+          <a:xfrm>
+            <a:off x="6428232" y="3364992"/>
+            <a:ext cx="1645920" cy="475488"/>
+          </a:xfrm>
+          <a:prstGeom prst="rect">
+            <a:avLst>
+              <a:gd name="adj" fmla="val 9615"/>
+            </a:avLst>
+          </a:prstGeom>
+          <a:solidFill>
+            <a:srgbClr val="FFFFFF"/>
+          </a:solidFill>
+          <a:ln w="12700">
+            <a:solidFill>
+              <a:srgbClr val="0D9488"/>
+            </a:solidFill>
+            <a:prstDash val="solid"/>
+          </a:ln>
+        </p:spPr>
+      </p:sp>
+      <p:sp>
+        <p:nvSpPr>
+          <p:cNvPr id="36" name="Text 34"/>
+          <p:cNvSpPr/>
+          <p:nvPr/>
+        </p:nvSpPr>
+        <p:spPr>
+          <a:xfrm>
+            <a:off x="6428232" y="3364992"/>
+            <a:ext cx="1645920" cy="475488"/>
+          </a:xfrm>
+          <a:prstGeom prst="rect">
+            <a:avLst/>
+          </a:prstGeom>
+          <a:noFill/>
+          <a:ln/>
+        </p:spPr>
+        <p:txBody>
+          <a:bodyPr wrap="square" lIns="0" tIns="0" rIns="0" bIns="0" rtlCol="0" anchor="ctr"/>
+          <a:lstStyle/>
+          <a:p>
+            <a:pPr algn="ctr" indent="0" marL="0">
+              <a:buNone/>
+            </a:pPr>
+            <a:r>
+              <a:rPr lang="en-US" sz="1400" b="1" dirty="0">
+                <a:solidFill>
+                  <a:srgbClr val="0D9488"/>
+                </a:solidFill>
+                <a:latin typeface="Trebuchet MS" pitchFamily="34" charset="0"/>
+                <a:ea typeface="Trebuchet MS" pitchFamily="34" charset="-122"/>
+                <a:cs typeface="Trebuchet MS" pitchFamily="34" charset="-120"/>
+              </a:rPr>
+              <a:t>ded</a:t>
+            </a:r>
+            <a:endParaRPr lang="en-US" sz="1400" dirty="0"/>
+          </a:p>
+        </p:txBody>
+      </p:sp>
+      <p:sp>
+        <p:nvSpPr>
+          <p:cNvPr id="37" name="Shape 35"/>
           <p:cNvSpPr/>
           <p:nvPr/>
         </p:nvSpPr>
@@ -30087,7 +30160,7 @@
       </p:sp>
       <p:sp>
         <p:nvSpPr>
-          <p:cNvPr id="31" name="Text 29"/>
+          <p:cNvPr id="38" name="Text 36"/>
           <p:cNvSpPr/>
           <p:nvPr/>
         </p:nvSpPr>
@@ -30126,7 +30199,7 @@
       </p:sp>
       <p:sp>
         <p:nvSpPr>
-          <p:cNvPr id="32" name="Shape 30"/>
+          <p:cNvPr id="39" name="Shape 37"/>
           <p:cNvSpPr/>
           <p:nvPr/>
         </p:nvSpPr>
@@ -30153,7 +30226,7 @@
       </p:sp>
       <p:sp>
         <p:nvSpPr>
-          <p:cNvPr id="33" name="Text 31"/>
+          <p:cNvPr id="40" name="Text 38"/>
           <p:cNvSpPr/>
           <p:nvPr/>
         </p:nvSpPr>
@@ -30615,7 +30688,7 @@
                 <a:ea typeface="Trebuchet MS" pitchFamily="34" charset="-122"/>
                 <a:cs typeface="Trebuchet MS" pitchFamily="34" charset="-120"/>
               </a:rPr>
-              <a:t>precede</a:t>
+              <a:t>preceded</a:t>
             </a:r>
             <a:endParaRPr lang="en-US" sz="2800" dirty="0"/>
           </a:p>
@@ -30695,7 +30768,7 @@
         </p:nvSpPr>
         <p:spPr>
           <a:xfrm>
-            <a:off x="2938272" y="2258568"/>
+            <a:off x="2221992" y="2258568"/>
             <a:ext cx="1828800" cy="292608"/>
           </a:xfrm>
           <a:prstGeom prst="rect">
@@ -30729,7 +30802,7 @@
         </p:nvSpPr>
         <p:spPr>
           <a:xfrm>
-            <a:off x="2938272" y="2258568"/>
+            <a:off x="2221992" y="2258568"/>
             <a:ext cx="1828800" cy="292608"/>
           </a:xfrm>
           <a:prstGeom prst="rect">
@@ -30768,7 +30841,7 @@
         </p:nvSpPr>
         <p:spPr>
           <a:xfrm>
-            <a:off x="2938272" y="2569464"/>
+            <a:off x="2221992" y="2569464"/>
             <a:ext cx="1828800" cy="201168"/>
           </a:xfrm>
           <a:prstGeom prst="rect">
@@ -30807,7 +30880,7 @@
         </p:nvSpPr>
         <p:spPr>
           <a:xfrm>
-            <a:off x="5803392" y="2258568"/>
+            <a:off x="4370832" y="2258568"/>
             <a:ext cx="1828800" cy="292608"/>
           </a:xfrm>
           <a:prstGeom prst="rect">
@@ -30841,7 +30914,7 @@
         </p:nvSpPr>
         <p:spPr>
           <a:xfrm>
-            <a:off x="5803392" y="2258568"/>
+            <a:off x="4370832" y="2258568"/>
             <a:ext cx="1828800" cy="292608"/>
           </a:xfrm>
           <a:prstGeom prst="rect">
@@ -30880,7 +30953,7 @@
         </p:nvSpPr>
         <p:spPr>
           <a:xfrm>
-            <a:off x="5803392" y="2569464"/>
+            <a:off x="4370832" y="2569464"/>
             <a:ext cx="1828800" cy="201168"/>
           </a:xfrm>
           <a:prstGeom prst="rect">
@@ -30919,6 +30992,157 @@
         </p:nvSpPr>
         <p:spPr>
           <a:xfrm>
+            <a:off x="6519672" y="2258568"/>
+            <a:ext cx="1828800" cy="292608"/>
+          </a:xfrm>
+          <a:prstGeom prst="rect">
+            <a:avLst>
+              <a:gd name="adj" fmla="val 25000"/>
+            </a:avLst>
+          </a:prstGeom>
+          <a:solidFill>
+            <a:srgbClr val="FCE7F3"/>
+          </a:solidFill>
+          <a:ln w="19050">
+            <a:solidFill>
+              <a:srgbClr val="DB2777"/>
+            </a:solidFill>
+            <a:prstDash val="solid"/>
+          </a:ln>
+          <a:effectLst>
+            <a:outerShdw sx="100000" sy="100000" kx="0" ky="0" algn="bl" rotWithShape="0" blurRad="101600" dist="38100" dir="8100000">
+              <a:srgbClr val="000000">
+                <a:alpha val="12000"/>
+              </a:srgbClr>
+            </a:outerShdw>
+          </a:effectLst>
+        </p:spPr>
+      </p:sp>
+      <p:sp>
+        <p:nvSpPr>
+          <p:cNvPr id="23" name="Text 21"/>
+          <p:cNvSpPr/>
+          <p:nvPr/>
+        </p:nvSpPr>
+        <p:spPr>
+          <a:xfrm>
+            <a:off x="6519672" y="2258568"/>
+            <a:ext cx="1828800" cy="292608"/>
+          </a:xfrm>
+          <a:prstGeom prst="rect">
+            <a:avLst/>
+          </a:prstGeom>
+          <a:noFill/>
+          <a:ln/>
+        </p:spPr>
+        <p:txBody>
+          <a:bodyPr wrap="square" lIns="0" tIns="0" rIns="0" bIns="0" rtlCol="0" anchor="ctr"/>
+          <a:lstStyle/>
+          <a:p>
+            <a:pPr algn="ctr" indent="0" marL="0">
+              <a:buNone/>
+            </a:pPr>
+            <a:r>
+              <a:rPr lang="en-US" sz="1300" b="1" dirty="0">
+                <a:solidFill>
+                  <a:srgbClr val="9D174D"/>
+                </a:solidFill>
+                <a:latin typeface="Trebuchet MS" pitchFamily="34" charset="0"/>
+                <a:ea typeface="Trebuchet MS" pitchFamily="34" charset="-122"/>
+                <a:cs typeface="Trebuchet MS" pitchFamily="34" charset="-120"/>
+              </a:rPr>
+              <a:t>d</a:t>
+            </a:r>
+            <a:endParaRPr lang="en-US" sz="1300" dirty="0"/>
+          </a:p>
+        </p:txBody>
+      </p:sp>
+      <p:sp>
+        <p:nvSpPr>
+          <p:cNvPr id="24" name="Text 22"/>
+          <p:cNvSpPr/>
+          <p:nvPr/>
+        </p:nvSpPr>
+        <p:spPr>
+          <a:xfrm>
+            <a:off x="6519672" y="2569464"/>
+            <a:ext cx="1828800" cy="201168"/>
+          </a:xfrm>
+          <a:prstGeom prst="rect">
+            <a:avLst/>
+          </a:prstGeom>
+          <a:noFill/>
+          <a:ln/>
+        </p:spPr>
+        <p:txBody>
+          <a:bodyPr wrap="square" lIns="0" tIns="0" rIns="0" bIns="0" rtlCol="0" anchor="t"/>
+          <a:lstStyle/>
+          <a:p>
+            <a:pPr algn="ctr" indent="0" marL="0">
+              <a:buNone/>
+            </a:pPr>
+            <a:r>
+              <a:rPr lang="en-US" sz="850" dirty="0">
+                <a:solidFill>
+                  <a:srgbClr val="475569"/>
+                </a:solidFill>
+                <a:latin typeface="Calibri" pitchFamily="34" charset="0"/>
+                <a:ea typeface="Calibri" pitchFamily="34" charset="-122"/>
+                <a:cs typeface="Calibri" pitchFamily="34" charset="-120"/>
+              </a:rPr>
+              <a:t>past tense</a:t>
+            </a:r>
+            <a:endParaRPr lang="en-US" sz="850" dirty="0"/>
+          </a:p>
+        </p:txBody>
+      </p:sp>
+      <p:sp>
+        <p:nvSpPr>
+          <p:cNvPr id="25" name="Text 23"/>
+          <p:cNvSpPr/>
+          <p:nvPr/>
+        </p:nvSpPr>
+        <p:spPr>
+          <a:xfrm>
+            <a:off x="6519672" y="2752344"/>
+            <a:ext cx="1828800" cy="182880"/>
+          </a:xfrm>
+          <a:prstGeom prst="rect">
+            <a:avLst/>
+          </a:prstGeom>
+          <a:noFill/>
+          <a:ln/>
+        </p:spPr>
+        <p:txBody>
+          <a:bodyPr wrap="square" lIns="0" tIns="0" rIns="0" bIns="0" rtlCol="0" anchor="t"/>
+          <a:lstStyle/>
+          <a:p>
+            <a:pPr algn="ctr" indent="0" marL="0">
+              <a:buNone/>
+            </a:pPr>
+            <a:r>
+              <a:rPr lang="en-US" sz="700" i="1" dirty="0">
+                <a:solidFill>
+                  <a:srgbClr val="94A3B8"/>
+                </a:solidFill>
+                <a:latin typeface="Calibri" pitchFamily="34" charset="0"/>
+                <a:ea typeface="Calibri" pitchFamily="34" charset="-122"/>
+                <a:cs typeface="Calibri" pitchFamily="34" charset="-120"/>
+              </a:rPr>
+              <a:t>'e' kept before 'd' suffix</a:t>
+            </a:r>
+            <a:endParaRPr lang="en-US" sz="700" dirty="0"/>
+          </a:p>
+        </p:txBody>
+      </p:sp>
+      <p:sp>
+        <p:nvSpPr>
+          <p:cNvPr id="26" name="Shape 24"/>
+          <p:cNvSpPr/>
+          <p:nvPr/>
+        </p:nvSpPr>
+        <p:spPr>
+          <a:xfrm>
             <a:off x="365760" y="3273552"/>
             <a:ext cx="1371600" cy="658368"/>
           </a:xfrm>
@@ -30940,7 +31164,7 @@
       </p:sp>
       <p:sp>
         <p:nvSpPr>
-          <p:cNvPr id="23" name="Text 21"/>
+          <p:cNvPr id="27" name="Text 25"/>
           <p:cNvSpPr/>
           <p:nvPr/>
         </p:nvSpPr>
@@ -30979,7 +31203,7 @@
       </p:sp>
       <p:sp>
         <p:nvSpPr>
-          <p:cNvPr id="24" name="Shape 22"/>
+          <p:cNvPr id="28" name="Shape 26"/>
           <p:cNvSpPr/>
           <p:nvPr/>
         </p:nvSpPr>
@@ -31006,13 +31230,13 @@
       </p:sp>
       <p:sp>
         <p:nvSpPr>
-          <p:cNvPr id="25" name="Shape 23"/>
-          <p:cNvSpPr/>
-          <p:nvPr/>
-        </p:nvSpPr>
-        <p:spPr>
-          <a:xfrm>
-            <a:off x="2999232" y="3364992"/>
+          <p:cNvPr id="29" name="Shape 27"/>
+          <p:cNvSpPr/>
+          <p:nvPr/>
+        </p:nvSpPr>
+        <p:spPr>
+          <a:xfrm>
+            <a:off x="2313432" y="3364992"/>
             <a:ext cx="1645920" cy="475488"/>
           </a:xfrm>
           <a:prstGeom prst="rect">
@@ -31033,13 +31257,13 @@
       </p:sp>
       <p:sp>
         <p:nvSpPr>
-          <p:cNvPr id="26" name="Text 24"/>
-          <p:cNvSpPr/>
-          <p:nvPr/>
-        </p:nvSpPr>
-        <p:spPr>
-          <a:xfrm>
-            <a:off x="2999232" y="3364992"/>
+          <p:cNvPr id="30" name="Text 28"/>
+          <p:cNvSpPr/>
+          <p:nvPr/>
+        </p:nvSpPr>
+        <p:spPr>
+          <a:xfrm>
+            <a:off x="2313432" y="3364992"/>
             <a:ext cx="1645920" cy="475488"/>
           </a:xfrm>
           <a:prstGeom prst="rect">
@@ -31072,14 +31296,14 @@
       </p:sp>
       <p:sp>
         <p:nvSpPr>
-          <p:cNvPr id="27" name="Text 25"/>
-          <p:cNvSpPr/>
-          <p:nvPr/>
-        </p:nvSpPr>
-        <p:spPr>
-          <a:xfrm>
-            <a:off x="4645152" y="3364992"/>
-            <a:ext cx="1097280" cy="475488"/>
+          <p:cNvPr id="31" name="Text 29"/>
+          <p:cNvSpPr/>
+          <p:nvPr/>
+        </p:nvSpPr>
+        <p:spPr>
+          <a:xfrm>
+            <a:off x="3959352" y="3364992"/>
+            <a:ext cx="411480" cy="475488"/>
           </a:xfrm>
           <a:prstGeom prst="rect">
             <a:avLst/>
@@ -31111,13 +31335,13 @@
       </p:sp>
       <p:sp>
         <p:nvSpPr>
-          <p:cNvPr id="28" name="Shape 26"/>
-          <p:cNvSpPr/>
-          <p:nvPr/>
-        </p:nvSpPr>
-        <p:spPr>
-          <a:xfrm>
-            <a:off x="5742432" y="3364992"/>
+          <p:cNvPr id="32" name="Shape 30"/>
+          <p:cNvSpPr/>
+          <p:nvPr/>
+        </p:nvSpPr>
+        <p:spPr>
+          <a:xfrm>
+            <a:off x="4370832" y="3364992"/>
             <a:ext cx="1645920" cy="475488"/>
           </a:xfrm>
           <a:prstGeom prst="rect">
@@ -31138,13 +31362,13 @@
       </p:sp>
       <p:sp>
         <p:nvSpPr>
-          <p:cNvPr id="29" name="Text 27"/>
-          <p:cNvSpPr/>
-          <p:nvPr/>
-        </p:nvSpPr>
-        <p:spPr>
-          <a:xfrm>
-            <a:off x="5742432" y="3364992"/>
+          <p:cNvPr id="33" name="Text 31"/>
+          <p:cNvSpPr/>
+          <p:nvPr/>
+        </p:nvSpPr>
+        <p:spPr>
+          <a:xfrm>
+            <a:off x="4370832" y="3364992"/>
             <a:ext cx="1645920" cy="475488"/>
           </a:xfrm>
           <a:prstGeom prst="rect">
@@ -31169,7 +31393,7 @@
                 <a:ea typeface="Trebuchet MS" pitchFamily="34" charset="-122"/>
                 <a:cs typeface="Trebuchet MS" pitchFamily="34" charset="-120"/>
               </a:rPr>
-              <a:t>cede</a:t>
+              <a:t>ce</a:t>
             </a:r>
             <a:endParaRPr lang="en-US" sz="1400" dirty="0"/>
           </a:p>
@@ -31177,7 +31401,112 @@
       </p:sp>
       <p:sp>
         <p:nvSpPr>
-          <p:cNvPr id="30" name="Shape 28"/>
+          <p:cNvPr id="34" name="Text 32"/>
+          <p:cNvSpPr/>
+          <p:nvPr/>
+        </p:nvSpPr>
+        <p:spPr>
+          <a:xfrm>
+            <a:off x="6016752" y="3364992"/>
+            <a:ext cx="411480" cy="475488"/>
+          </a:xfrm>
+          <a:prstGeom prst="rect">
+            <a:avLst/>
+          </a:prstGeom>
+          <a:noFill/>
+          <a:ln/>
+        </p:spPr>
+        <p:txBody>
+          <a:bodyPr wrap="square" lIns="0" tIns="0" rIns="0" bIns="0" rtlCol="0" anchor="ctr"/>
+          <a:lstStyle/>
+          <a:p>
+            <a:pPr algn="ctr" indent="0" marL="0">
+              <a:buNone/>
+            </a:pPr>
+            <a:r>
+              <a:rPr lang="en-US" sz="1600" b="1" dirty="0">
+                <a:solidFill>
+                  <a:srgbClr val="0D9488"/>
+                </a:solidFill>
+                <a:latin typeface="Trebuchet MS" pitchFamily="34" charset="0"/>
+                <a:ea typeface="Trebuchet MS" pitchFamily="34" charset="-122"/>
+                <a:cs typeface="Trebuchet MS" pitchFamily="34" charset="-120"/>
+              </a:rPr>
+              <a:t>·</a:t>
+            </a:r>
+            <a:endParaRPr lang="en-US" sz="1600" dirty="0"/>
+          </a:p>
+        </p:txBody>
+      </p:sp>
+      <p:sp>
+        <p:nvSpPr>
+          <p:cNvPr id="35" name="Shape 33"/>
+          <p:cNvSpPr/>
+          <p:nvPr/>
+        </p:nvSpPr>
+        <p:spPr>
+          <a:xfrm>
+            <a:off x="6428232" y="3364992"/>
+            <a:ext cx="1645920" cy="475488"/>
+          </a:xfrm>
+          <a:prstGeom prst="rect">
+            <a:avLst>
+              <a:gd name="adj" fmla="val 9615"/>
+            </a:avLst>
+          </a:prstGeom>
+          <a:solidFill>
+            <a:srgbClr val="FFFFFF"/>
+          </a:solidFill>
+          <a:ln w="12700">
+            <a:solidFill>
+              <a:srgbClr val="0D9488"/>
+            </a:solidFill>
+            <a:prstDash val="solid"/>
+          </a:ln>
+        </p:spPr>
+      </p:sp>
+      <p:sp>
+        <p:nvSpPr>
+          <p:cNvPr id="36" name="Text 34"/>
+          <p:cNvSpPr/>
+          <p:nvPr/>
+        </p:nvSpPr>
+        <p:spPr>
+          <a:xfrm>
+            <a:off x="6428232" y="3364992"/>
+            <a:ext cx="1645920" cy="475488"/>
+          </a:xfrm>
+          <a:prstGeom prst="rect">
+            <a:avLst/>
+          </a:prstGeom>
+          <a:noFill/>
+          <a:ln/>
+        </p:spPr>
+        <p:txBody>
+          <a:bodyPr wrap="square" lIns="0" tIns="0" rIns="0" bIns="0" rtlCol="0" anchor="ctr"/>
+          <a:lstStyle/>
+          <a:p>
+            <a:pPr algn="ctr" indent="0" marL="0">
+              <a:buNone/>
+            </a:pPr>
+            <a:r>
+              <a:rPr lang="en-US" sz="1400" b="1" dirty="0">
+                <a:solidFill>
+                  <a:srgbClr val="0D9488"/>
+                </a:solidFill>
+                <a:latin typeface="Trebuchet MS" pitchFamily="34" charset="0"/>
+                <a:ea typeface="Trebuchet MS" pitchFamily="34" charset="-122"/>
+                <a:cs typeface="Trebuchet MS" pitchFamily="34" charset="-120"/>
+              </a:rPr>
+              <a:t>ded</a:t>
+            </a:r>
+            <a:endParaRPr lang="en-US" sz="1400" dirty="0"/>
+          </a:p>
+        </p:txBody>
+      </p:sp>
+      <p:sp>
+        <p:nvSpPr>
+          <p:cNvPr id="37" name="Shape 35"/>
           <p:cNvSpPr/>
           <p:nvPr/>
         </p:nvSpPr>
@@ -31204,7 +31533,7 @@
       </p:sp>
       <p:sp>
         <p:nvSpPr>
-          <p:cNvPr id="31" name="Text 29"/>
+          <p:cNvPr id="38" name="Text 36"/>
           <p:cNvSpPr/>
           <p:nvPr/>
         </p:nvSpPr>
@@ -31243,7 +31572,7 @@
       </p:sp>
       <p:sp>
         <p:nvSpPr>
-          <p:cNvPr id="32" name="Shape 30"/>
+          <p:cNvPr id="39" name="Shape 37"/>
           <p:cNvSpPr/>
           <p:nvPr/>
         </p:nvSpPr>
@@ -31270,13 +31599,13 @@
       </p:sp>
       <p:sp>
         <p:nvSpPr>
-          <p:cNvPr id="33" name="Shape 31"/>
-          <p:cNvSpPr/>
-          <p:nvPr/>
-        </p:nvSpPr>
-        <p:spPr>
-          <a:xfrm>
-            <a:off x="2124837" y="4169664"/>
+          <p:cNvPr id="40" name="Shape 38"/>
+          <p:cNvSpPr/>
+          <p:nvPr/>
+        </p:nvSpPr>
+        <p:spPr>
+          <a:xfrm>
+            <a:off x="2023872" y="4169664"/>
             <a:ext cx="685800" cy="384048"/>
           </a:xfrm>
           <a:prstGeom prst="rect">
@@ -31297,13 +31626,13 @@
       </p:sp>
       <p:sp>
         <p:nvSpPr>
-          <p:cNvPr id="34" name="Text 32"/>
-          <p:cNvSpPr/>
-          <p:nvPr/>
-        </p:nvSpPr>
-        <p:spPr>
-          <a:xfrm>
-            <a:off x="2124837" y="4169664"/>
+          <p:cNvPr id="41" name="Text 39"/>
+          <p:cNvSpPr/>
+          <p:nvPr/>
+        </p:nvSpPr>
+        <p:spPr>
+          <a:xfrm>
+            <a:off x="2023872" y="4169664"/>
             <a:ext cx="685800" cy="384048"/>
           </a:xfrm>
           <a:prstGeom prst="rect">
@@ -31336,13 +31665,13 @@
       </p:sp>
       <p:sp>
         <p:nvSpPr>
-          <p:cNvPr id="35" name="Shape 33"/>
-          <p:cNvSpPr/>
-          <p:nvPr/>
-        </p:nvSpPr>
-        <p:spPr>
-          <a:xfrm>
-            <a:off x="3033522" y="4169664"/>
+          <p:cNvPr id="42" name="Shape 40"/>
+          <p:cNvSpPr/>
+          <p:nvPr/>
+        </p:nvSpPr>
+        <p:spPr>
+          <a:xfrm>
+            <a:off x="2831592" y="4169664"/>
             <a:ext cx="685800" cy="384048"/>
           </a:xfrm>
           <a:prstGeom prst="rect">
@@ -31363,13 +31692,13 @@
       </p:sp>
       <p:sp>
         <p:nvSpPr>
-          <p:cNvPr id="36" name="Text 34"/>
-          <p:cNvSpPr/>
-          <p:nvPr/>
-        </p:nvSpPr>
-        <p:spPr>
-          <a:xfrm>
-            <a:off x="3033522" y="4169664"/>
+          <p:cNvPr id="43" name="Text 41"/>
+          <p:cNvSpPr/>
+          <p:nvPr/>
+        </p:nvSpPr>
+        <p:spPr>
+          <a:xfrm>
+            <a:off x="2831592" y="4169664"/>
             <a:ext cx="685800" cy="384048"/>
           </a:xfrm>
           <a:prstGeom prst="rect">
@@ -31402,13 +31731,13 @@
       </p:sp>
       <p:sp>
         <p:nvSpPr>
-          <p:cNvPr id="37" name="Shape 35"/>
-          <p:cNvSpPr/>
-          <p:nvPr/>
-        </p:nvSpPr>
-        <p:spPr>
-          <a:xfrm>
-            <a:off x="3942207" y="4169664"/>
+          <p:cNvPr id="44" name="Shape 42"/>
+          <p:cNvSpPr/>
+          <p:nvPr/>
+        </p:nvSpPr>
+        <p:spPr>
+          <a:xfrm>
+            <a:off x="3639312" y="4169664"/>
             <a:ext cx="685800" cy="384048"/>
           </a:xfrm>
           <a:prstGeom prst="rect">
@@ -31429,13 +31758,13 @@
       </p:sp>
       <p:sp>
         <p:nvSpPr>
-          <p:cNvPr id="38" name="Text 36"/>
-          <p:cNvSpPr/>
-          <p:nvPr/>
-        </p:nvSpPr>
-        <p:spPr>
-          <a:xfrm>
-            <a:off x="3942207" y="4169664"/>
+          <p:cNvPr id="45" name="Text 43"/>
+          <p:cNvSpPr/>
+          <p:nvPr/>
+        </p:nvSpPr>
+        <p:spPr>
+          <a:xfrm>
+            <a:off x="3639312" y="4169664"/>
             <a:ext cx="685800" cy="384048"/>
           </a:xfrm>
           <a:prstGeom prst="rect">
@@ -31468,13 +31797,13 @@
       </p:sp>
       <p:sp>
         <p:nvSpPr>
-          <p:cNvPr id="39" name="Shape 37"/>
-          <p:cNvSpPr/>
-          <p:nvPr/>
-        </p:nvSpPr>
-        <p:spPr>
-          <a:xfrm>
-            <a:off x="4850892" y="4169664"/>
+          <p:cNvPr id="46" name="Shape 44"/>
+          <p:cNvSpPr/>
+          <p:nvPr/>
+        </p:nvSpPr>
+        <p:spPr>
+          <a:xfrm>
+            <a:off x="4447032" y="4169664"/>
             <a:ext cx="685800" cy="384048"/>
           </a:xfrm>
           <a:prstGeom prst="rect">
@@ -31495,13 +31824,13 @@
       </p:sp>
       <p:sp>
         <p:nvSpPr>
-          <p:cNvPr id="40" name="Text 38"/>
-          <p:cNvSpPr/>
-          <p:nvPr/>
-        </p:nvSpPr>
-        <p:spPr>
-          <a:xfrm>
-            <a:off x="4850892" y="4169664"/>
+          <p:cNvPr id="47" name="Text 45"/>
+          <p:cNvSpPr/>
+          <p:nvPr/>
+        </p:nvSpPr>
+        <p:spPr>
+          <a:xfrm>
+            <a:off x="4447032" y="4169664"/>
             <a:ext cx="685800" cy="384048"/>
           </a:xfrm>
           <a:prstGeom prst="rect">
@@ -31534,13 +31863,13 @@
       </p:sp>
       <p:sp>
         <p:nvSpPr>
-          <p:cNvPr id="41" name="Text 39"/>
-          <p:cNvSpPr/>
-          <p:nvPr/>
-        </p:nvSpPr>
-        <p:spPr>
-          <a:xfrm>
-            <a:off x="4850892" y="4572000"/>
+          <p:cNvPr id="48" name="Text 46"/>
+          <p:cNvSpPr/>
+          <p:nvPr/>
+        </p:nvSpPr>
+        <p:spPr>
+          <a:xfrm>
+            <a:off x="4447032" y="4572000"/>
             <a:ext cx="685800" cy="219456"/>
           </a:xfrm>
           <a:prstGeom prst="rect">
@@ -31573,13 +31902,13 @@
       </p:sp>
       <p:sp>
         <p:nvSpPr>
-          <p:cNvPr id="42" name="Shape 40"/>
-          <p:cNvSpPr/>
-          <p:nvPr/>
-        </p:nvSpPr>
-        <p:spPr>
-          <a:xfrm>
-            <a:off x="5759577" y="4169664"/>
+          <p:cNvPr id="49" name="Shape 47"/>
+          <p:cNvSpPr/>
+          <p:nvPr/>
+        </p:nvSpPr>
+        <p:spPr>
+          <a:xfrm>
+            <a:off x="5254752" y="4169664"/>
             <a:ext cx="685800" cy="384048"/>
           </a:xfrm>
           <a:prstGeom prst="rect">
@@ -31600,13 +31929,13 @@
       </p:sp>
       <p:sp>
         <p:nvSpPr>
-          <p:cNvPr id="43" name="Text 41"/>
-          <p:cNvSpPr/>
-          <p:nvPr/>
-        </p:nvSpPr>
-        <p:spPr>
-          <a:xfrm>
-            <a:off x="5759577" y="4169664"/>
+          <p:cNvPr id="50" name="Text 48"/>
+          <p:cNvSpPr/>
+          <p:nvPr/>
+        </p:nvSpPr>
+        <p:spPr>
+          <a:xfrm>
+            <a:off x="5254752" y="4169664"/>
             <a:ext cx="685800" cy="384048"/>
           </a:xfrm>
           <a:prstGeom prst="rect">
@@ -31639,13 +31968,13 @@
       </p:sp>
       <p:sp>
         <p:nvSpPr>
-          <p:cNvPr id="44" name="Shape 42"/>
-          <p:cNvSpPr/>
-          <p:nvPr/>
-        </p:nvSpPr>
-        <p:spPr>
-          <a:xfrm>
-            <a:off x="6668262" y="4169664"/>
+          <p:cNvPr id="51" name="Shape 49"/>
+          <p:cNvSpPr/>
+          <p:nvPr/>
+        </p:nvSpPr>
+        <p:spPr>
+          <a:xfrm>
+            <a:off x="6062472" y="4169664"/>
             <a:ext cx="685800" cy="384048"/>
           </a:xfrm>
           <a:prstGeom prst="rect">
@@ -31666,13 +31995,13 @@
       </p:sp>
       <p:sp>
         <p:nvSpPr>
-          <p:cNvPr id="45" name="Text 43"/>
-          <p:cNvSpPr/>
-          <p:nvPr/>
-        </p:nvSpPr>
-        <p:spPr>
-          <a:xfrm>
-            <a:off x="6668262" y="4169664"/>
+          <p:cNvPr id="52" name="Text 50"/>
+          <p:cNvSpPr/>
+          <p:nvPr/>
+        </p:nvSpPr>
+        <p:spPr>
+          <a:xfrm>
+            <a:off x="6062472" y="4169664"/>
             <a:ext cx="685800" cy="384048"/>
           </a:xfrm>
           <a:prstGeom prst="rect">
@@ -31705,13 +32034,13 @@
       </p:sp>
       <p:sp>
         <p:nvSpPr>
-          <p:cNvPr id="46" name="Shape 44"/>
-          <p:cNvSpPr/>
-          <p:nvPr/>
-        </p:nvSpPr>
-        <p:spPr>
-          <a:xfrm>
-            <a:off x="7576947" y="4169664"/>
+          <p:cNvPr id="53" name="Shape 51"/>
+          <p:cNvSpPr/>
+          <p:nvPr/>
+        </p:nvSpPr>
+        <p:spPr>
+          <a:xfrm>
+            <a:off x="6870192" y="4169664"/>
             <a:ext cx="685800" cy="384048"/>
           </a:xfrm>
           <a:prstGeom prst="rect">
@@ -31732,13 +32061,13 @@
       </p:sp>
       <p:sp>
         <p:nvSpPr>
-          <p:cNvPr id="47" name="Text 45"/>
-          <p:cNvSpPr/>
-          <p:nvPr/>
-        </p:nvSpPr>
-        <p:spPr>
-          <a:xfrm>
-            <a:off x="7576947" y="4169664"/>
+          <p:cNvPr id="54" name="Text 52"/>
+          <p:cNvSpPr/>
+          <p:nvPr/>
+        </p:nvSpPr>
+        <p:spPr>
+          <a:xfrm>
+            <a:off x="6870192" y="4169664"/>
             <a:ext cx="685800" cy="384048"/>
           </a:xfrm>
           <a:prstGeom prst="rect">
@@ -31764,6 +32093,72 @@
                 <a:cs typeface="Trebuchet MS" pitchFamily="34" charset="-120"/>
               </a:rPr>
               <a:t>e</a:t>
+            </a:r>
+            <a:endParaRPr lang="en-US" sz="900" dirty="0"/>
+          </a:p>
+        </p:txBody>
+      </p:sp>
+      <p:sp>
+        <p:nvSpPr>
+          <p:cNvPr id="55" name="Shape 53"/>
+          <p:cNvSpPr/>
+          <p:nvPr/>
+        </p:nvSpPr>
+        <p:spPr>
+          <a:xfrm>
+            <a:off x="7677912" y="4169664"/>
+            <a:ext cx="685800" cy="384048"/>
+          </a:xfrm>
+          <a:prstGeom prst="rect">
+            <a:avLst>
+              <a:gd name="adj" fmla="val 9524"/>
+            </a:avLst>
+          </a:prstGeom>
+          <a:solidFill>
+            <a:srgbClr val="FFFFFF"/>
+          </a:solidFill>
+          <a:ln w="12700">
+            <a:solidFill>
+              <a:srgbClr val="DB2777"/>
+            </a:solidFill>
+            <a:prstDash val="solid"/>
+          </a:ln>
+        </p:spPr>
+      </p:sp>
+      <p:sp>
+        <p:nvSpPr>
+          <p:cNvPr id="56" name="Text 54"/>
+          <p:cNvSpPr/>
+          <p:nvPr/>
+        </p:nvSpPr>
+        <p:spPr>
+          <a:xfrm>
+            <a:off x="7677912" y="4169664"/>
+            <a:ext cx="685800" cy="384048"/>
+          </a:xfrm>
+          <a:prstGeom prst="rect">
+            <a:avLst/>
+          </a:prstGeom>
+          <a:noFill/>
+          <a:ln/>
+        </p:spPr>
+        <p:txBody>
+          <a:bodyPr wrap="square" lIns="0" tIns="0" rIns="0" bIns="0" rtlCol="0" anchor="ctr"/>
+          <a:lstStyle/>
+          <a:p>
+            <a:pPr algn="ctr" indent="0" marL="0">
+              <a:buNone/>
+            </a:pPr>
+            <a:r>
+              <a:rPr lang="en-US" sz="900" b="1" dirty="0">
+                <a:solidFill>
+                  <a:srgbClr val="9D174D"/>
+                </a:solidFill>
+                <a:latin typeface="Trebuchet MS" pitchFamily="34" charset="0"/>
+                <a:ea typeface="Trebuchet MS" pitchFamily="34" charset="-122"/>
+                <a:cs typeface="Trebuchet MS" pitchFamily="34" charset="-120"/>
+              </a:rPr>
+              <a:t>d</a:t>
             </a:r>
             <a:endParaRPr lang="en-US" sz="900" dirty="0"/>
           </a:p>
@@ -33717,7 +34112,7 @@
                 <a:ea typeface="Trebuchet MS" pitchFamily="34" charset="-122"/>
                 <a:cs typeface="Trebuchet MS" pitchFamily="34" charset="-120"/>
               </a:rPr>
-              <a:t>se-</a:t>
+              <a:t>re-</a:t>
             </a:r>
             <a:endParaRPr lang="en-US" sz="1300" dirty="0"/>
           </a:p>
@@ -33870,7 +34265,7 @@
                 <a:ea typeface="Trebuchet MS" pitchFamily="34" charset="-122"/>
                 <a:cs typeface="Trebuchet MS" pitchFamily="34" charset="-120"/>
               </a:rPr>
-              <a:t>con-</a:t>
+              <a:t>se-</a:t>
             </a:r>
             <a:endParaRPr lang="en-US" sz="1300" dirty="0"/>
           </a:p>
@@ -34023,7 +34418,7 @@
                 <a:ea typeface="Trebuchet MS" pitchFamily="34" charset="-122"/>
                 <a:cs typeface="Trebuchet MS" pitchFamily="34" charset="-120"/>
               </a:rPr>
-              <a:t>ac-</a:t>
+              <a:t>pro-</a:t>
             </a:r>
             <a:endParaRPr lang="en-US" sz="1300" dirty="0"/>
           </a:p>
@@ -34176,7 +34571,7 @@
                 <a:ea typeface="Trebuchet MS" pitchFamily="34" charset="-122"/>
                 <a:cs typeface="Trebuchet MS" pitchFamily="34" charset="-120"/>
               </a:rPr>
-              <a:t>re-</a:t>
+              <a:t>con-</a:t>
             </a:r>
             <a:endParaRPr lang="en-US" sz="1300" dirty="0"/>
           </a:p>
@@ -34265,7 +34660,7 @@
                 <a:ea typeface="Trebuchet MS" pitchFamily="34" charset="-122"/>
                 <a:cs typeface="Trebuchet MS" pitchFamily="34" charset="-120"/>
               </a:rPr>
-              <a:t>-r</a:t>
+              <a:t>-ding</a:t>
             </a:r>
             <a:endParaRPr lang="en-US" sz="1300" dirty="0"/>
           </a:p>
@@ -34436,7 +34831,7 @@
                 <a:ea typeface="Trebuchet MS" pitchFamily="34" charset="-122"/>
                 <a:cs typeface="Trebuchet MS" pitchFamily="34" charset="-120"/>
               </a:rPr>
-              <a:t>secede</a:t>
+              <a:t>recede</a:t>
             </a:r>
             <a:endParaRPr lang="en-US" sz="1200" dirty="0"/>
           </a:p>
@@ -34502,7 +34897,7 @@
                 <a:ea typeface="Trebuchet MS" pitchFamily="34" charset="-122"/>
                 <a:cs typeface="Trebuchet MS" pitchFamily="34" charset="-120"/>
               </a:rPr>
-              <a:t>concede</a:t>
+              <a:t>secede</a:t>
             </a:r>
             <a:endParaRPr lang="en-US" sz="1200" dirty="0"/>
           </a:p>
@@ -34568,7 +34963,7 @@
                 <a:ea typeface="Trebuchet MS" pitchFamily="34" charset="-122"/>
                 <a:cs typeface="Trebuchet MS" pitchFamily="34" charset="-120"/>
               </a:rPr>
-              <a:t>accede</a:t>
+              <a:t>concede</a:t>
             </a:r>
             <a:endParaRPr lang="en-US" sz="1200" dirty="0"/>
           </a:p>
@@ -34634,7 +35029,7 @@
                 <a:ea typeface="Trebuchet MS" pitchFamily="34" charset="-122"/>
                 <a:cs typeface="Trebuchet MS" pitchFamily="34" charset="-120"/>
               </a:rPr>
-              <a:t>recede</a:t>
+              <a:t>preceded</a:t>
             </a:r>
             <a:endParaRPr lang="en-US" sz="1200" dirty="0"/>
           </a:p>
@@ -34700,7 +35095,7 @@
                 <a:ea typeface="Trebuchet MS" pitchFamily="34" charset="-122"/>
                 <a:cs typeface="Trebuchet MS" pitchFamily="34" charset="-120"/>
               </a:rPr>
-              <a:t>preceded</a:t>
+              <a:t>receding</a:t>
             </a:r>
             <a:endParaRPr lang="en-US" sz="1200" dirty="0"/>
           </a:p>
@@ -34832,7 +35227,7 @@
                 <a:ea typeface="Trebuchet MS" pitchFamily="34" charset="-122"/>
                 <a:cs typeface="Trebuchet MS" pitchFamily="34" charset="-120"/>
               </a:rPr>
-              <a:t>recedes</a:t>
+              <a:t>precedes</a:t>
             </a:r>
             <a:endParaRPr lang="en-US" sz="1200" dirty="0"/>
           </a:p>
@@ -36020,7 +36415,7 @@
                 <a:ea typeface="Calibri" pitchFamily="34" charset="-122"/>
                 <a:cs typeface="Calibri" pitchFamily="34" charset="-120"/>
               </a:rPr>
-              <a:t>1.  The root 'cede' comes from a Latin word meaning to go or yield.</a:t>
+              <a:t>1.  When a country secedes, it breaks away from a larger group.</a:t>
             </a:r>
             <a:endParaRPr lang="en-US" sz="1300" dirty="0"/>
           </a:p>
@@ -36159,7 +36554,7 @@
                 <a:ea typeface="Calibri" pitchFamily="34" charset="-122"/>
                 <a:cs typeface="Calibri" pitchFamily="34" charset="-120"/>
               </a:rPr>
-              <a:t>2.  The word 'precede' means to come after something else.</a:t>
+              <a:t>2.  The root 'cede' is originally from Greek.</a:t>
             </a:r>
             <a:endParaRPr lang="en-US" sz="1300" dirty="0"/>
           </a:p>
@@ -36298,7 +36693,7 @@
                 <a:ea typeface="Calibri" pitchFamily="34" charset="-122"/>
                 <a:cs typeface="Calibri" pitchFamily="34" charset="-120"/>
               </a:rPr>
-              <a:t>3.  In the word 'concede', the prefix 'con' means together or with.</a:t>
+              <a:t>3.  The root 'cede' comes from a Latin word meaning to go or yield.</a:t>
             </a:r>
             <a:endParaRPr lang="en-US" sz="1300" dirty="0"/>
           </a:p>
@@ -36437,7 +36832,7 @@
                 <a:ea typeface="Calibri" pitchFamily="34" charset="-122"/>
                 <a:cs typeface="Calibri" pitchFamily="34" charset="-120"/>
               </a:rPr>
-              <a:t>4.  The word 'recede' contains the root 'cede' meaning to go or yield.</a:t>
+              <a:t>4.  The word 'precede' means to come after something in order.</a:t>
             </a:r>
             <a:endParaRPr lang="en-US" sz="1300" dirty="0"/>
           </a:p>
@@ -36460,11 +36855,11 @@
             </a:avLst>
           </a:prstGeom>
           <a:solidFill>
-            <a:srgbClr val="DCFCE7"/>
-          </a:solidFill>
-          <a:ln w="12700">
-            <a:solidFill>
-              <a:srgbClr val="16A34A"/>
+            <a:srgbClr val="FEE2E2"/>
+          </a:solidFill>
+          <a:ln w="12700">
+            <a:solidFill>
+              <a:srgbClr val="DC2626"/>
             </a:solidFill>
             <a:prstDash val="solid"/>
           </a:ln>
@@ -36497,13 +36892,13 @@
             <a:r>
               <a:rPr lang="en-US" sz="1100" b="1" dirty="0">
                 <a:solidFill>
-                  <a:srgbClr val="16A34A"/>
+                  <a:srgbClr val="DC2626"/>
                 </a:solidFill>
                 <a:latin typeface="Trebuchet MS" pitchFamily="34" charset="0"/>
                 <a:ea typeface="Trebuchet MS" pitchFamily="34" charset="-122"/>
                 <a:cs typeface="Trebuchet MS" pitchFamily="34" charset="-120"/>
               </a:rPr>
-              <a:t>TRUE</a:t>
+              <a:t>FALSE</a:t>
             </a:r>
             <a:endParaRPr lang="en-US" sz="1100" dirty="0"/>
           </a:p>
@@ -36576,7 +36971,7 @@
                 <a:ea typeface="Calibri" pitchFamily="34" charset="-122"/>
                 <a:cs typeface="Calibri" pitchFamily="34" charset="-120"/>
               </a:rPr>
-              <a:t>5.  The root 'cede' comes from a Greek word.</a:t>
+              <a:t>5.  The prefix 're' in 'recede' means back, so recede means to go back.</a:t>
             </a:r>
             <a:endParaRPr lang="en-US" sz="1300" dirty="0"/>
           </a:p>
@@ -36599,11 +36994,11 @@
             </a:avLst>
           </a:prstGeom>
           <a:solidFill>
-            <a:srgbClr val="FEE2E2"/>
-          </a:solidFill>
-          <a:ln w="12700">
-            <a:solidFill>
-              <a:srgbClr val="DC2626"/>
+            <a:srgbClr val="DCFCE7"/>
+          </a:solidFill>
+          <a:ln w="12700">
+            <a:solidFill>
+              <a:srgbClr val="16A34A"/>
             </a:solidFill>
             <a:prstDash val="solid"/>
           </a:ln>
@@ -36636,13 +37031,13 @@
             <a:r>
               <a:rPr lang="en-US" sz="1100" b="1" dirty="0">
                 <a:solidFill>
-                  <a:srgbClr val="DC2626"/>
+                  <a:srgbClr val="16A34A"/>
                 </a:solidFill>
                 <a:latin typeface="Trebuchet MS" pitchFamily="34" charset="0"/>
                 <a:ea typeface="Trebuchet MS" pitchFamily="34" charset="-122"/>
                 <a:cs typeface="Trebuchet MS" pitchFamily="34" charset="-120"/>
               </a:rPr>
-              <a:t>FALSE</a:t>
+              <a:t>TRUE</a:t>
             </a:r>
             <a:endParaRPr lang="en-US" sz="1100" dirty="0"/>
           </a:p>
@@ -37281,7 +37676,7 @@
                 <a:ea typeface="Trebuchet MS" pitchFamily="34" charset="-122"/>
                 <a:cs typeface="Trebuchet MS" pitchFamily="34" charset="-120"/>
               </a:rPr>
-              <a:t>secede</a:t>
+              <a:t>recede</a:t>
             </a:r>
             <a:endParaRPr lang="en-US" sz="1300" dirty="0"/>
           </a:p>
@@ -37347,7 +37742,7 @@
                 <a:ea typeface="Trebuchet MS" pitchFamily="34" charset="-122"/>
                 <a:cs typeface="Trebuchet MS" pitchFamily="34" charset="-120"/>
               </a:rPr>
-              <a:t>concede</a:t>
+              <a:t>secede</a:t>
             </a:r>
             <a:endParaRPr lang="en-US" sz="1300" dirty="0"/>
           </a:p>
@@ -37413,7 +37808,7 @@
                 <a:ea typeface="Trebuchet MS" pitchFamily="34" charset="-122"/>
                 <a:cs typeface="Trebuchet MS" pitchFamily="34" charset="-120"/>
               </a:rPr>
-              <a:t>accede</a:t>
+              <a:t>concede</a:t>
             </a:r>
             <a:endParaRPr lang="en-US" sz="1300" dirty="0"/>
           </a:p>
@@ -37479,7 +37874,7 @@
                 <a:ea typeface="Trebuchet MS" pitchFamily="34" charset="-122"/>
                 <a:cs typeface="Trebuchet MS" pitchFamily="34" charset="-120"/>
               </a:rPr>
-              <a:t>recede</a:t>
+              <a:t>preceded</a:t>
             </a:r>
             <a:endParaRPr lang="en-US" sz="1300" dirty="0"/>
           </a:p>
@@ -37545,7 +37940,7 @@
                 <a:ea typeface="Trebuchet MS" pitchFamily="34" charset="-122"/>
                 <a:cs typeface="Trebuchet MS" pitchFamily="34" charset="-120"/>
               </a:rPr>
-              <a:t>preceded</a:t>
+              <a:t>receding</a:t>
             </a:r>
             <a:endParaRPr lang="en-US" sz="1300" dirty="0"/>
           </a:p>
@@ -38396,7 +38791,7 @@
                 <a:ea typeface="Trebuchet MS" pitchFamily="34" charset="-122"/>
                 <a:cs typeface="Trebuchet MS" pitchFamily="34" charset="-120"/>
               </a:rPr>
-              <a:t>se-</a:t>
+              <a:t>re-</a:t>
             </a:r>
             <a:endParaRPr lang="en-US" sz="1300" dirty="0"/>
           </a:p>
@@ -38549,7 +38944,7 @@
                 <a:ea typeface="Trebuchet MS" pitchFamily="34" charset="-122"/>
                 <a:cs typeface="Trebuchet MS" pitchFamily="34" charset="-120"/>
               </a:rPr>
-              <a:t>con-</a:t>
+              <a:t>se-</a:t>
             </a:r>
             <a:endParaRPr lang="en-US" sz="1300" dirty="0"/>
           </a:p>
@@ -38702,7 +39097,7 @@
                 <a:ea typeface="Trebuchet MS" pitchFamily="34" charset="-122"/>
                 <a:cs typeface="Trebuchet MS" pitchFamily="34" charset="-120"/>
               </a:rPr>
-              <a:t>ac-</a:t>
+              <a:t>pro-</a:t>
             </a:r>
             <a:endParaRPr lang="en-US" sz="1300" dirty="0"/>
           </a:p>
@@ -38855,7 +39250,7 @@
                 <a:ea typeface="Trebuchet MS" pitchFamily="34" charset="-122"/>
                 <a:cs typeface="Trebuchet MS" pitchFamily="34" charset="-120"/>
               </a:rPr>
-              <a:t>re-</a:t>
+              <a:t>con-</a:t>
             </a:r>
             <a:endParaRPr lang="en-US" sz="1300" dirty="0"/>
           </a:p>
@@ -38944,7 +39339,7 @@
                 <a:ea typeface="Trebuchet MS" pitchFamily="34" charset="-122"/>
                 <a:cs typeface="Trebuchet MS" pitchFamily="34" charset="-120"/>
               </a:rPr>
-              <a:t>-r</a:t>
+              <a:t>-ding</a:t>
             </a:r>
             <a:endParaRPr lang="en-US" sz="1300" dirty="0"/>
           </a:p>
@@ -39855,7 +40250,7 @@
                 <a:ea typeface="Calibri" pitchFamily="34" charset="-122"/>
                 <a:cs typeface="Calibri" pitchFamily="34" charset="-120"/>
               </a:rPr>
-              <a:t>Admitted defeat or gave something up unwillingly.</a:t>
+              <a:t>Admitted defeat or gave up something willingly.</a:t>
             </a:r>
             <a:endParaRPr lang="en-US" sz="1200" dirty="0"/>
           </a:p>
@@ -39928,7 +40323,7 @@
                 <a:ea typeface="Trebuchet MS" pitchFamily="34" charset="-122"/>
                 <a:cs typeface="Trebuchet MS" pitchFamily="34" charset="-120"/>
               </a:rPr>
-              <a:t>secede</a:t>
+              <a:t>recede</a:t>
             </a:r>
             <a:endParaRPr lang="en-US" sz="1200" dirty="0"/>
           </a:p>
@@ -39994,7 +40389,7 @@
                 <a:ea typeface="Calibri" pitchFamily="34" charset="-122"/>
                 <a:cs typeface="Calibri" pitchFamily="34" charset="-120"/>
               </a:rPr>
-              <a:t>To agree to a request or to take on a position of power.</a:t>
+              <a:t>To admit that something is true, or to give something up.</a:t>
             </a:r>
             <a:endParaRPr lang="en-US" sz="1200" dirty="0"/>
           </a:p>
@@ -40067,7 +40462,7 @@
                 <a:ea typeface="Trebuchet MS" pitchFamily="34" charset="-122"/>
                 <a:cs typeface="Trebuchet MS" pitchFamily="34" charset="-120"/>
               </a:rPr>
-              <a:t>concede</a:t>
+              <a:t>secede</a:t>
             </a:r>
             <a:endParaRPr lang="en-US" sz="1200" dirty="0"/>
           </a:p>
@@ -40133,7 +40528,7 @@
                 <a:ea typeface="Calibri" pitchFamily="34" charset="-122"/>
                 <a:cs typeface="Calibri" pitchFamily="34" charset="-120"/>
               </a:rPr>
-              <a:t>Came before something else that happened later.</a:t>
+              <a:t>Gradually moving back or becoming smaller.</a:t>
             </a:r>
             <a:endParaRPr lang="en-US" sz="1200" dirty="0"/>
           </a:p>
@@ -40206,7 +40601,7 @@
                 <a:ea typeface="Trebuchet MS" pitchFamily="34" charset="-122"/>
                 <a:cs typeface="Trebuchet MS" pitchFamily="34" charset="-120"/>
               </a:rPr>
-              <a:t>accede</a:t>
+              <a:t>concede</a:t>
             </a:r>
             <a:endParaRPr lang="en-US" sz="1200" dirty="0"/>
           </a:p>
@@ -40272,7 +40667,7 @@
                 <a:ea typeface="Calibri" pitchFamily="34" charset="-122"/>
                 <a:cs typeface="Calibri" pitchFamily="34" charset="-120"/>
               </a:rPr>
-              <a:t>To move back or become smaller and further away.</a:t>
+              <a:t>Came before something else in time or position.</a:t>
             </a:r>
             <a:endParaRPr lang="en-US" sz="1200" dirty="0"/>
           </a:p>
@@ -40345,7 +40740,7 @@
                 <a:ea typeface="Trebuchet MS" pitchFamily="34" charset="-122"/>
                 <a:cs typeface="Trebuchet MS" pitchFamily="34" charset="-120"/>
               </a:rPr>
-              <a:t>recede</a:t>
+              <a:t>preceded</a:t>
             </a:r>
             <a:endParaRPr lang="en-US" sz="1200" dirty="0"/>
           </a:p>
@@ -40411,7 +40806,7 @@
                 <a:ea typeface="Calibri" pitchFamily="34" charset="-122"/>
                 <a:cs typeface="Calibri" pitchFamily="34" charset="-120"/>
               </a:rPr>
-              <a:t>To come before something else in time or order.</a:t>
+              <a:t>To come before something or someone in time or order.</a:t>
             </a:r>
             <a:endParaRPr lang="en-US" sz="1200" dirty="0"/>
           </a:p>
@@ -40484,7 +40879,7 @@
                 <a:ea typeface="Trebuchet MS" pitchFamily="34" charset="-122"/>
                 <a:cs typeface="Trebuchet MS" pitchFamily="34" charset="-120"/>
               </a:rPr>
-              <a:t>preceded</a:t>
+              <a:t>receding</a:t>
             </a:r>
             <a:endParaRPr lang="en-US" sz="1200" dirty="0"/>
           </a:p>
@@ -40550,7 +40945,7 @@
                 <a:ea typeface="Calibri" pitchFamily="34" charset="-122"/>
                 <a:cs typeface="Calibri" pitchFamily="34" charset="-120"/>
               </a:rPr>
-              <a:t>To admit that something is true or to give something up, often after a fight or argument.</a:t>
+              <a:t>To formally break away from a group or country.</a:t>
             </a:r>
             <a:endParaRPr lang="en-US" sz="1200" dirty="0"/>
           </a:p>
@@ -40689,7 +41084,7 @@
                 <a:ea typeface="Calibri" pitchFamily="34" charset="-122"/>
                 <a:cs typeface="Calibri" pitchFamily="34" charset="-120"/>
               </a:rPr>
-              <a:t>To formally break away from a group or country.</a:t>
+              <a:t>To move back or become smaller and further away.</a:t>
             </a:r>
             <a:endParaRPr lang="en-US" sz="1200" dirty="0"/>
           </a:p>
@@ -41184,7 +41579,7 @@
                 <a:ea typeface="Calibri" pitchFamily="34" charset="-122"/>
                 <a:cs typeface="Calibri" pitchFamily="34" charset="-120"/>
               </a:rPr>
-              <a:t>The dark storm clouds began to recede as the afternoon sunshine broke through.</a:t>
+              <a:t>In a race, the runner who takes the lead will precede all the others across the finish line.</a:t>
             </a:r>
             <a:endParaRPr lang="en-US" sz="1500" dirty="0"/>
           </a:p>
@@ -41348,7 +41743,7 @@
                 <a:ea typeface="Calibri" pitchFamily="34" charset="-122"/>
                 <a:cs typeface="Calibri" pitchFamily="34" charset="-120"/>
               </a:rPr>
-              <a:t>In a debate, it is important to concede a point when the other side has strong evidence.</a:t>
+              <a:t>After heavy rain, the floodwaters slowly began to recede and the streets were safe again.</a:t>
             </a:r>
             <a:endParaRPr lang="en-US" sz="1500" dirty="0"/>
           </a:p>
@@ -41512,7 +41907,7 @@
                 <a:ea typeface="Calibri" pitchFamily="34" charset="-122"/>
                 <a:cs typeface="Calibri" pitchFamily="34" charset="-120"/>
               </a:rPr>
-              <a:t>Monday will always precede Tuesday, no matter what week it is.</a:t>
+              <a:t>The team captain had to concede that the other side had played a brilliant game.</a:t>
             </a:r>
             <a:endParaRPr lang="en-US" sz="1500" dirty="0"/>
           </a:p>
